--- a/實務專題簡報_疲勞監測系統.pptx
+++ b/實務專題簡報_疲勞監測系統.pptx
@@ -3091,9 +3091,15 @@
   <p:cSld>
     <p:bg>
       <p:bgPr>
-        <a:solidFill>
-          <a:srgbClr val="FFFFFF"/>
-        </a:solidFill>
+        <a:blipFill dpi="0" rotWithShape="1">
+          <a:blip r:embed="rId2">
+            <a:lum/>
+          </a:blip>
+          <a:srcRect/>
+          <a:stretch>
+            <a:fillRect/>
+          </a:stretch>
+        </a:blipFill>
         <a:effectLst/>
       </p:bgPr>
     </p:bg>
@@ -3119,8 +3125,8 @@
         </p:nvSpPr>
         <p:spPr>
           <a:xfrm>
-            <a:off x="457200" y="1371600"/>
-            <a:ext cx="8229600" cy="1371600"/>
+            <a:off x="457200" y="992833"/>
+            <a:ext cx="8229600" cy="1446550"/>
           </a:xfrm>
           <a:prstGeom prst="rect">
             <a:avLst/>
@@ -3137,23 +3143,45 @@
               <a:defRPr sz="4400" b="1"/>
             </a:pPr>
             <a:r>
-              <a:rPr dirty="0" err="1"/>
+              <a:rPr lang="zh-TW" altLang="en-US" dirty="0">
+                <a:latin typeface="HGMinchoE" panose="02020909000000000000" pitchFamily="49" charset="-128"/>
+                <a:ea typeface="HGMinchoE" panose="02020909000000000000" pitchFamily="49" charset="-128"/>
+              </a:rPr>
+              <a:t>結合人臉影像與生理特徵之</a:t>
+            </a:r>
+            <a:endParaRPr lang="en-US" altLang="zh-TW" dirty="0">
+              <a:latin typeface="HGMinchoE" panose="02020909000000000000" pitchFamily="49" charset="-128"/>
+              <a:ea typeface="HGMinchoE" panose="02020909000000000000" pitchFamily="49" charset="-128"/>
+            </a:endParaRPr>
+          </a:p>
+          <a:p>
+            <a:pPr algn="ctr">
+              <a:defRPr sz="4400" b="1"/>
+            </a:pPr>
+            <a:r>
+              <a:rPr lang="zh-TW" altLang="en-US" dirty="0">
+                <a:latin typeface="HGMinchoE" panose="02020909000000000000" pitchFamily="49" charset="-128"/>
+                <a:ea typeface="HGMinchoE" panose="02020909000000000000" pitchFamily="49" charset="-128"/>
+              </a:rPr>
               <a:t>軍用無人機駕駛疲勞監測系統</a:t>
             </a:r>
-            <a:endParaRPr dirty="0"/>
-          </a:p>
-        </p:txBody>
-      </p:sp>
-      <p:sp>
-        <p:nvSpPr>
-          <p:cNvPr id="3" name="TextBox 2"/>
+            <a:endParaRPr dirty="0">
+              <a:latin typeface="HGMinchoE" panose="02020909000000000000" pitchFamily="49" charset="-128"/>
+              <a:ea typeface="HGMinchoE" panose="02020909000000000000" pitchFamily="49" charset="-128"/>
+            </a:endParaRPr>
+          </a:p>
+        </p:txBody>
+      </p:sp>
+      <p:sp>
+        <p:nvSpPr>
+          <p:cNvPr id="4" name="TextBox 3"/>
           <p:cNvSpPr txBox="1"/>
           <p:nvPr/>
         </p:nvSpPr>
         <p:spPr>
           <a:xfrm>
-            <a:off x="457200" y="2926080"/>
-            <a:ext cx="8229600" cy="1097280"/>
+            <a:off x="457200" y="4318328"/>
+            <a:ext cx="8229600" cy="707886"/>
           </a:xfrm>
           <a:prstGeom prst="rect">
             <a:avLst/>
@@ -3166,39 +3194,6 @@
           </a:bodyPr>
           <a:lstStyle/>
           <a:p>
-            <a:pPr algn="ctr">
-              <a:defRPr sz="2400"/>
-            </a:pPr>
-            <a:r>
-              <a:rPr dirty="0" err="1"/>
-              <a:t>結合人臉影像與生理特徵</a:t>
-            </a:r>
-            <a:endParaRPr dirty="0"/>
-          </a:p>
-        </p:txBody>
-      </p:sp>
-      <p:sp>
-        <p:nvSpPr>
-          <p:cNvPr id="4" name="TextBox 3"/>
-          <p:cNvSpPr txBox="1"/>
-          <p:nvPr/>
-        </p:nvSpPr>
-        <p:spPr>
-          <a:xfrm>
-            <a:off x="457200" y="4297680"/>
-            <a:ext cx="8229600" cy="646331"/>
-          </a:xfrm>
-          <a:prstGeom prst="rect">
-            <a:avLst/>
-          </a:prstGeom>
-          <a:noFill/>
-        </p:spPr>
-        <p:txBody>
-          <a:bodyPr wrap="square">
-            <a:spAutoFit/>
-          </a:bodyPr>
-          <a:lstStyle/>
-          <a:p>
             <a:endParaRPr dirty="0"/>
           </a:p>
           <a:p>
@@ -3206,10 +3201,16 @@
               <a:defRPr sz="1800"/>
             </a:pPr>
             <a:r>
-              <a:rPr lang="zh-TW" altLang="en-US" dirty="0"/>
+              <a:rPr lang="zh-TW" altLang="en-US" sz="2200" dirty="0">
+                <a:latin typeface="HGSGothicE" panose="020B0900000000000000" pitchFamily="34" charset="-128"/>
+                <a:ea typeface="HGSGothicE" panose="020B0900000000000000" pitchFamily="34" charset="-128"/>
+              </a:rPr>
               <a:t>組員：李奕辰</a:t>
             </a:r>
-            <a:endParaRPr dirty="0"/>
+            <a:endParaRPr sz="2200" dirty="0">
+              <a:latin typeface="HGSGothicE" panose="020B0900000000000000" pitchFamily="34" charset="-128"/>
+              <a:ea typeface="HGSGothicE" panose="020B0900000000000000" pitchFamily="34" charset="-128"/>
+            </a:endParaRPr>
           </a:p>
         </p:txBody>
       </p:sp>
@@ -3226,9 +3227,15 @@
   <p:cSld>
     <p:bg>
       <p:bgPr>
-        <a:solidFill>
-          <a:srgbClr val="FFFFFF"/>
-        </a:solidFill>
+        <a:blipFill dpi="0" rotWithShape="1">
+          <a:blip r:embed="rId2">
+            <a:lum/>
+          </a:blip>
+          <a:srcRect/>
+          <a:stretch>
+            <a:fillRect/>
+          </a:stretch>
+        </a:blipFill>
         <a:effectLst/>
       </p:bgPr>
     </p:bg>
@@ -3255,7 +3262,7 @@
         <p:spPr>
           <a:xfrm>
             <a:off x="457200" y="365760"/>
-            <a:ext cx="8229600" cy="640080"/>
+            <a:ext cx="2242922" cy="707886"/>
           </a:xfrm>
           <a:prstGeom prst="rect">
             <a:avLst/>
@@ -3272,8 +3279,16 @@
               <a:defRPr sz="4000" b="1"/>
             </a:pPr>
             <a:r>
+              <a:rPr dirty="0" err="1">
+                <a:latin typeface="HGMinchoE" panose="02020909000000000000" pitchFamily="49" charset="-128"/>
+                <a:ea typeface="HGMinchoE" panose="02020909000000000000" pitchFamily="49" charset="-128"/>
+              </a:rPr>
               <a:t>測試結果</a:t>
             </a:r>
+            <a:endParaRPr dirty="0">
+              <a:latin typeface="HGMinchoE" panose="02020909000000000000" pitchFamily="49" charset="-128"/>
+              <a:ea typeface="HGMinchoE" panose="02020909000000000000" pitchFamily="49" charset="-128"/>
+            </a:endParaRPr>
           </a:p>
         </p:txBody>
       </p:sp>
@@ -3286,7 +3301,7 @@
         <p:spPr>
           <a:xfrm>
             <a:off x="914400" y="1371600"/>
-            <a:ext cx="7315200" cy="5029200"/>
+            <a:ext cx="7315200" cy="3754874"/>
           </a:xfrm>
           <a:prstGeom prst="rect">
             <a:avLst/>
@@ -3299,7 +3314,7 @@
           </a:bodyPr>
           <a:lstStyle/>
           <a:p>
-            <a:endParaRPr/>
+            <a:endParaRPr dirty="0"/>
           </a:p>
           <a:p>
             <a:pPr>
@@ -3312,8 +3327,23 @@
               <a:defRPr sz="2200"/>
             </a:pPr>
             <a:r>
-              <a:t>• 功能測試：所有核心功能驗證</a:t>
-            </a:r>
+              <a:rPr sz="3200" dirty="0">
+                <a:latin typeface="HGSGothicE" panose="020B0900000000000000" pitchFamily="34" charset="-128"/>
+                <a:ea typeface="HGSGothicE" panose="020B0900000000000000" pitchFamily="34" charset="-128"/>
+              </a:rPr>
+              <a:t>• </a:t>
+            </a:r>
+            <a:r>
+              <a:rPr sz="3200" dirty="0" err="1">
+                <a:latin typeface="HGSGothicE" panose="020B0900000000000000" pitchFamily="34" charset="-128"/>
+                <a:ea typeface="HGSGothicE" panose="020B0900000000000000" pitchFamily="34" charset="-128"/>
+              </a:rPr>
+              <a:t>功能測試：所有核心功能驗證</a:t>
+            </a:r>
+            <a:endParaRPr sz="3200" dirty="0">
+              <a:latin typeface="HGSGothicE" panose="020B0900000000000000" pitchFamily="34" charset="-128"/>
+              <a:ea typeface="HGSGothicE" panose="020B0900000000000000" pitchFamily="34" charset="-128"/>
+            </a:endParaRPr>
           </a:p>
           <a:p>
             <a:pPr>
@@ -3326,7 +3356,25 @@
               <a:defRPr sz="2200"/>
             </a:pPr>
             <a:r>
-              <a:t>• 效能測試：即時處理 30fps</a:t>
+              <a:rPr sz="3200" dirty="0">
+                <a:latin typeface="HGSGothicE" panose="020B0900000000000000" pitchFamily="34" charset="-128"/>
+                <a:ea typeface="HGSGothicE" panose="020B0900000000000000" pitchFamily="34" charset="-128"/>
+              </a:rPr>
+              <a:t>• </a:t>
+            </a:r>
+            <a:r>
+              <a:rPr sz="3200" dirty="0" err="1">
+                <a:latin typeface="HGSGothicE" panose="020B0900000000000000" pitchFamily="34" charset="-128"/>
+                <a:ea typeface="HGSGothicE" panose="020B0900000000000000" pitchFamily="34" charset="-128"/>
+              </a:rPr>
+              <a:t>效能測試：即時處理</a:t>
+            </a:r>
+            <a:r>
+              <a:rPr sz="3200" dirty="0">
+                <a:latin typeface="HGSGothicE" panose="020B0900000000000000" pitchFamily="34" charset="-128"/>
+                <a:ea typeface="HGSGothicE" panose="020B0900000000000000" pitchFamily="34" charset="-128"/>
+              </a:rPr>
+              <a:t> 30fps</a:t>
             </a:r>
           </a:p>
           <a:p>
@@ -3340,8 +3388,23 @@
               <a:defRPr sz="2200"/>
             </a:pPr>
             <a:r>
-              <a:t>• 穩定性：長時間運作正常</a:t>
-            </a:r>
+              <a:rPr sz="3200" dirty="0">
+                <a:latin typeface="HGSGothicE" panose="020B0900000000000000" pitchFamily="34" charset="-128"/>
+                <a:ea typeface="HGSGothicE" panose="020B0900000000000000" pitchFamily="34" charset="-128"/>
+              </a:rPr>
+              <a:t>• </a:t>
+            </a:r>
+            <a:r>
+              <a:rPr sz="3200" dirty="0" err="1">
+                <a:latin typeface="HGSGothicE" panose="020B0900000000000000" pitchFamily="34" charset="-128"/>
+                <a:ea typeface="HGSGothicE" panose="020B0900000000000000" pitchFamily="34" charset="-128"/>
+              </a:rPr>
+              <a:t>穩定性：長時間運作正常</a:t>
+            </a:r>
+            <a:endParaRPr sz="3200" dirty="0">
+              <a:latin typeface="HGSGothicE" panose="020B0900000000000000" pitchFamily="34" charset="-128"/>
+              <a:ea typeface="HGSGothicE" panose="020B0900000000000000" pitchFamily="34" charset="-128"/>
+            </a:endParaRPr>
           </a:p>
           <a:p>
             <a:pPr>
@@ -3354,8 +3417,16 @@
               <a:defRPr sz="2200"/>
             </a:pPr>
             <a:r>
+              <a:rPr sz="3200" dirty="0" err="1">
+                <a:latin typeface="HGSGothicE" panose="020B0900000000000000" pitchFamily="34" charset="-128"/>
+                <a:ea typeface="HGSGothicE" panose="020B0900000000000000" pitchFamily="34" charset="-128"/>
+              </a:rPr>
               <a:t>待補：量化準確率測試</a:t>
             </a:r>
+            <a:endParaRPr sz="3200" dirty="0">
+              <a:latin typeface="HGSGothicE" panose="020B0900000000000000" pitchFamily="34" charset="-128"/>
+              <a:ea typeface="HGSGothicE" panose="020B0900000000000000" pitchFamily="34" charset="-128"/>
+            </a:endParaRPr>
           </a:p>
           <a:p>
             <a:pPr>
@@ -3368,8 +3439,16 @@
               <a:defRPr sz="2200"/>
             </a:pPr>
             <a:r>
+              <a:rPr sz="3200" dirty="0" err="1">
+                <a:latin typeface="HGSGothicE" panose="020B0900000000000000" pitchFamily="34" charset="-128"/>
+                <a:ea typeface="HGSGothicE" panose="020B0900000000000000" pitchFamily="34" charset="-128"/>
+              </a:rPr>
               <a:t>待補：不同光線與姿勢評估</a:t>
             </a:r>
+            <a:endParaRPr sz="3200" dirty="0">
+              <a:latin typeface="HGSGothicE" panose="020B0900000000000000" pitchFamily="34" charset="-128"/>
+              <a:ea typeface="HGSGothicE" panose="020B0900000000000000" pitchFamily="34" charset="-128"/>
+            </a:endParaRPr>
           </a:p>
         </p:txBody>
       </p:sp>
@@ -3386,9 +3465,15 @@
   <p:cSld>
     <p:bg>
       <p:bgPr>
-        <a:solidFill>
-          <a:srgbClr val="FFFFFF"/>
-        </a:solidFill>
+        <a:blipFill dpi="0" rotWithShape="1">
+          <a:blip r:embed="rId2">
+            <a:lum/>
+          </a:blip>
+          <a:srcRect/>
+          <a:stretch>
+            <a:fillRect/>
+          </a:stretch>
+        </a:blipFill>
         <a:effectLst/>
       </p:bgPr>
     </p:bg>
@@ -3415,7 +3500,7 @@
         <p:spPr>
           <a:xfrm>
             <a:off x="457200" y="365760"/>
-            <a:ext cx="8229600" cy="640080"/>
+            <a:ext cx="2757486" cy="707886"/>
           </a:xfrm>
           <a:prstGeom prst="rect">
             <a:avLst/>
@@ -3432,8 +3517,16 @@
               <a:defRPr sz="4000" b="1"/>
             </a:pPr>
             <a:r>
+              <a:rPr dirty="0" err="1">
+                <a:latin typeface="HGMinchoE" panose="02020909000000000000" pitchFamily="49" charset="-128"/>
+                <a:ea typeface="HGMinchoE" panose="02020909000000000000" pitchFamily="49" charset="-128"/>
+              </a:rPr>
               <a:t>挑戰與解決</a:t>
             </a:r>
+            <a:endParaRPr dirty="0">
+              <a:latin typeface="HGMinchoE" panose="02020909000000000000" pitchFamily="49" charset="-128"/>
+              <a:ea typeface="HGMinchoE" panose="02020909000000000000" pitchFamily="49" charset="-128"/>
+            </a:endParaRPr>
           </a:p>
         </p:txBody>
       </p:sp>
@@ -3446,7 +3539,7 @@
         <p:spPr>
           <a:xfrm>
             <a:off x="914400" y="1371600"/>
-            <a:ext cx="7315200" cy="5029200"/>
+            <a:ext cx="7315200" cy="3754874"/>
           </a:xfrm>
           <a:prstGeom prst="rect">
             <a:avLst/>
@@ -3459,7 +3552,7 @@
           </a:bodyPr>
           <a:lstStyle/>
           <a:p>
-            <a:endParaRPr/>
+            <a:endParaRPr dirty="0"/>
           </a:p>
           <a:p>
             <a:pPr>
@@ -3472,8 +3565,16 @@
               <a:defRPr sz="2200"/>
             </a:pPr>
             <a:r>
+              <a:rPr sz="3200" dirty="0" err="1">
+                <a:latin typeface="HGSGothicE" panose="020B0900000000000000" pitchFamily="34" charset="-128"/>
+                <a:ea typeface="HGSGothicE" panose="020B0900000000000000" pitchFamily="34" charset="-128"/>
+              </a:rPr>
               <a:t>挑戰：光線影響偵測準確度</a:t>
             </a:r>
+            <a:endParaRPr sz="3200" dirty="0">
+              <a:latin typeface="HGSGothicE" panose="020B0900000000000000" pitchFamily="34" charset="-128"/>
+              <a:ea typeface="HGSGothicE" panose="020B0900000000000000" pitchFamily="34" charset="-128"/>
+            </a:endParaRPr>
           </a:p>
           <a:p>
             <a:pPr>
@@ -3486,8 +3587,30 @@
               <a:defRPr sz="2200"/>
             </a:pPr>
             <a:r>
-              <a:t>  → 多特徵融合提高鲁棒性</a:t>
-            </a:r>
+              <a:rPr sz="3200" dirty="0">
+                <a:latin typeface="HGSGothicE" panose="020B0900000000000000" pitchFamily="34" charset="-128"/>
+                <a:ea typeface="HGSGothicE" panose="020B0900000000000000" pitchFamily="34" charset="-128"/>
+              </a:rPr>
+              <a:t>  → </a:t>
+            </a:r>
+            <a:r>
+              <a:rPr sz="3200" dirty="0" err="1">
+                <a:latin typeface="HGSGothicE" panose="020B0900000000000000" pitchFamily="34" charset="-128"/>
+                <a:ea typeface="HGSGothicE" panose="020B0900000000000000" pitchFamily="34" charset="-128"/>
+              </a:rPr>
+              <a:t>多特徵融合提高</a:t>
+            </a:r>
+            <a:r>
+              <a:rPr lang="zh-TW" altLang="en-US" sz="3200" dirty="0">
+                <a:latin typeface="HGSGothicE" panose="020B0900000000000000" pitchFamily="34" charset="-128"/>
+                <a:ea typeface="HGSGothicE" panose="020B0900000000000000" pitchFamily="34" charset="-128"/>
+              </a:rPr>
+              <a:t>穩健性</a:t>
+            </a:r>
+            <a:endParaRPr sz="3200" dirty="0">
+              <a:latin typeface="HGSGothicE" panose="020B0900000000000000" pitchFamily="34" charset="-128"/>
+              <a:ea typeface="HGSGothicE" panose="020B0900000000000000" pitchFamily="34" charset="-128"/>
+            </a:endParaRPr>
           </a:p>
           <a:p>
             <a:pPr>
@@ -3499,7 +3622,10 @@
               </a:spcAft>
               <a:defRPr sz="2200"/>
             </a:pPr>
-            <a:endParaRPr/>
+            <a:endParaRPr sz="3200" dirty="0">
+              <a:latin typeface="HGSGothicE" panose="020B0900000000000000" pitchFamily="34" charset="-128"/>
+              <a:ea typeface="HGSGothicE" panose="020B0900000000000000" pitchFamily="34" charset="-128"/>
+            </a:endParaRPr>
           </a:p>
           <a:p>
             <a:pPr>
@@ -3512,8 +3638,16 @@
               <a:defRPr sz="2200"/>
             </a:pPr>
             <a:r>
+              <a:rPr sz="3200" dirty="0" err="1">
+                <a:latin typeface="HGSGothicE" panose="020B0900000000000000" pitchFamily="34" charset="-128"/>
+                <a:ea typeface="HGSGothicE" panose="020B0900000000000000" pitchFamily="34" charset="-128"/>
+              </a:rPr>
               <a:t>挑戰：即時性與準確率平衡</a:t>
             </a:r>
+            <a:endParaRPr sz="3200" dirty="0">
+              <a:latin typeface="HGSGothicE" panose="020B0900000000000000" pitchFamily="34" charset="-128"/>
+              <a:ea typeface="HGSGothicE" panose="020B0900000000000000" pitchFamily="34" charset="-128"/>
+            </a:endParaRPr>
           </a:p>
           <a:p>
             <a:pPr>
@@ -3526,8 +3660,37 @@
               <a:defRPr sz="2200"/>
             </a:pPr>
             <a:r>
-              <a:t>  → 分層處理 + 多指標整合</a:t>
-            </a:r>
+              <a:rPr sz="3200" dirty="0">
+                <a:latin typeface="HGSGothicE" panose="020B0900000000000000" pitchFamily="34" charset="-128"/>
+                <a:ea typeface="HGSGothicE" panose="020B0900000000000000" pitchFamily="34" charset="-128"/>
+              </a:rPr>
+              <a:t>  → </a:t>
+            </a:r>
+            <a:r>
+              <a:rPr sz="3200" dirty="0" err="1">
+                <a:latin typeface="HGSGothicE" panose="020B0900000000000000" pitchFamily="34" charset="-128"/>
+                <a:ea typeface="HGSGothicE" panose="020B0900000000000000" pitchFamily="34" charset="-128"/>
+              </a:rPr>
+              <a:t>分層處理</a:t>
+            </a:r>
+            <a:r>
+              <a:rPr sz="3200" dirty="0">
+                <a:latin typeface="HGSGothicE" panose="020B0900000000000000" pitchFamily="34" charset="-128"/>
+                <a:ea typeface="HGSGothicE" panose="020B0900000000000000" pitchFamily="34" charset="-128"/>
+              </a:rPr>
+              <a:t> + </a:t>
+            </a:r>
+            <a:r>
+              <a:rPr sz="3200" dirty="0" err="1">
+                <a:latin typeface="HGSGothicE" panose="020B0900000000000000" pitchFamily="34" charset="-128"/>
+                <a:ea typeface="HGSGothicE" panose="020B0900000000000000" pitchFamily="34" charset="-128"/>
+              </a:rPr>
+              <a:t>多指標整合</a:t>
+            </a:r>
+            <a:endParaRPr sz="3200" dirty="0">
+              <a:latin typeface="HGSGothicE" panose="020B0900000000000000" pitchFamily="34" charset="-128"/>
+              <a:ea typeface="HGSGothicE" panose="020B0900000000000000" pitchFamily="34" charset="-128"/>
+            </a:endParaRPr>
           </a:p>
         </p:txBody>
       </p:sp>
@@ -3544,9 +3707,15 @@
   <p:cSld>
     <p:bg>
       <p:bgPr>
-        <a:solidFill>
-          <a:srgbClr val="FFFFFF"/>
-        </a:solidFill>
+        <a:blipFill dpi="0" rotWithShape="1">
+          <a:blip r:embed="rId2">
+            <a:lum/>
+          </a:blip>
+          <a:srcRect/>
+          <a:stretch>
+            <a:fillRect/>
+          </a:stretch>
+        </a:blipFill>
         <a:effectLst/>
       </p:bgPr>
     </p:bg>
@@ -3573,7 +3742,7 @@
         <p:spPr>
           <a:xfrm>
             <a:off x="457200" y="365760"/>
-            <a:ext cx="8229600" cy="640080"/>
+            <a:ext cx="1213794" cy="707886"/>
           </a:xfrm>
           <a:prstGeom prst="rect">
             <a:avLst/>
@@ -3590,8 +3759,16 @@
               <a:defRPr sz="4000" b="1"/>
             </a:pPr>
             <a:r>
+              <a:rPr dirty="0" err="1">
+                <a:latin typeface="HGMinchoE" panose="02020909000000000000" pitchFamily="49" charset="-128"/>
+                <a:ea typeface="HGMinchoE" panose="02020909000000000000" pitchFamily="49" charset="-128"/>
+              </a:rPr>
               <a:t>結論</a:t>
             </a:r>
+            <a:endParaRPr dirty="0">
+              <a:latin typeface="HGMinchoE" panose="02020909000000000000" pitchFamily="49" charset="-128"/>
+              <a:ea typeface="HGMinchoE" panose="02020909000000000000" pitchFamily="49" charset="-128"/>
+            </a:endParaRPr>
           </a:p>
         </p:txBody>
       </p:sp>
@@ -3604,7 +3781,7 @@
         <p:spPr>
           <a:xfrm>
             <a:off x="914400" y="1371600"/>
-            <a:ext cx="7315200" cy="5029200"/>
+            <a:ext cx="7315200" cy="3057247"/>
           </a:xfrm>
           <a:prstGeom prst="rect">
             <a:avLst/>
@@ -3617,7 +3794,7 @@
           </a:bodyPr>
           <a:lstStyle/>
           <a:p>
-            <a:endParaRPr/>
+            <a:endParaRPr dirty="0"/>
           </a:p>
           <a:p>
             <a:pPr>
@@ -3630,8 +3807,23 @@
               <a:defRPr sz="2200"/>
             </a:pPr>
             <a:r>
-              <a:t>• 建立結合臉部與生理特徵的系統</a:t>
-            </a:r>
+              <a:rPr sz="3200" dirty="0">
+                <a:latin typeface="HGSGothicE" panose="020B0900000000000000" pitchFamily="34" charset="-128"/>
+                <a:ea typeface="HGSGothicE" panose="020B0900000000000000" pitchFamily="34" charset="-128"/>
+              </a:rPr>
+              <a:t>• </a:t>
+            </a:r>
+            <a:r>
+              <a:rPr sz="3200" dirty="0" err="1">
+                <a:latin typeface="HGSGothicE" panose="020B0900000000000000" pitchFamily="34" charset="-128"/>
+                <a:ea typeface="HGSGothicE" panose="020B0900000000000000" pitchFamily="34" charset="-128"/>
+              </a:rPr>
+              <a:t>建立結合臉部與生理特徵的系統</a:t>
+            </a:r>
+            <a:endParaRPr sz="3200" dirty="0">
+              <a:latin typeface="HGSGothicE" panose="020B0900000000000000" pitchFamily="34" charset="-128"/>
+              <a:ea typeface="HGSGothicE" panose="020B0900000000000000" pitchFamily="34" charset="-128"/>
+            </a:endParaRPr>
           </a:p>
           <a:p>
             <a:pPr>
@@ -3644,8 +3836,23 @@
               <a:defRPr sz="2200"/>
             </a:pPr>
             <a:r>
-              <a:t>• 所有核心功能已完成驗證</a:t>
-            </a:r>
+              <a:rPr sz="3200" dirty="0">
+                <a:latin typeface="HGSGothicE" panose="020B0900000000000000" pitchFamily="34" charset="-128"/>
+                <a:ea typeface="HGSGothicE" panose="020B0900000000000000" pitchFamily="34" charset="-128"/>
+              </a:rPr>
+              <a:t>• </a:t>
+            </a:r>
+            <a:r>
+              <a:rPr sz="3200" dirty="0" err="1">
+                <a:latin typeface="HGSGothicE" panose="020B0900000000000000" pitchFamily="34" charset="-128"/>
+                <a:ea typeface="HGSGothicE" panose="020B0900000000000000" pitchFamily="34" charset="-128"/>
+              </a:rPr>
+              <a:t>所有核心功能已完成驗證</a:t>
+            </a:r>
+            <a:endParaRPr sz="3200" dirty="0">
+              <a:latin typeface="HGSGothicE" panose="020B0900000000000000" pitchFamily="34" charset="-128"/>
+              <a:ea typeface="HGSGothicE" panose="020B0900000000000000" pitchFamily="34" charset="-128"/>
+            </a:endParaRPr>
           </a:p>
           <a:p>
             <a:pPr>
@@ -3658,8 +3865,23 @@
               <a:defRPr sz="2200"/>
             </a:pPr>
             <a:r>
-              <a:t>• 可作為駕駛員安全輔助工具</a:t>
-            </a:r>
+              <a:rPr sz="3200" dirty="0">
+                <a:latin typeface="HGSGothicE" panose="020B0900000000000000" pitchFamily="34" charset="-128"/>
+                <a:ea typeface="HGSGothicE" panose="020B0900000000000000" pitchFamily="34" charset="-128"/>
+              </a:rPr>
+              <a:t>• </a:t>
+            </a:r>
+            <a:r>
+              <a:rPr sz="3200" dirty="0" err="1">
+                <a:latin typeface="HGSGothicE" panose="020B0900000000000000" pitchFamily="34" charset="-128"/>
+                <a:ea typeface="HGSGothicE" panose="020B0900000000000000" pitchFamily="34" charset="-128"/>
+              </a:rPr>
+              <a:t>可作為駕駛員安全輔助工具</a:t>
+            </a:r>
+            <a:endParaRPr sz="3200" dirty="0">
+              <a:latin typeface="HGSGothicE" panose="020B0900000000000000" pitchFamily="34" charset="-128"/>
+              <a:ea typeface="HGSGothicE" panose="020B0900000000000000" pitchFamily="34" charset="-128"/>
+            </a:endParaRPr>
           </a:p>
           <a:p>
             <a:pPr>
@@ -3672,8 +3894,23 @@
               <a:defRPr sz="2200"/>
             </a:pPr>
             <a:r>
-              <a:t>• 後續優化準確率與泛化能力</a:t>
-            </a:r>
+              <a:rPr sz="3200" dirty="0">
+                <a:latin typeface="HGSGothicE" panose="020B0900000000000000" pitchFamily="34" charset="-128"/>
+                <a:ea typeface="HGSGothicE" panose="020B0900000000000000" pitchFamily="34" charset="-128"/>
+              </a:rPr>
+              <a:t>• </a:t>
+            </a:r>
+            <a:r>
+              <a:rPr sz="3200" dirty="0" err="1">
+                <a:latin typeface="HGSGothicE" panose="020B0900000000000000" pitchFamily="34" charset="-128"/>
+                <a:ea typeface="HGSGothicE" panose="020B0900000000000000" pitchFamily="34" charset="-128"/>
+              </a:rPr>
+              <a:t>後續優化準確率與泛化能力</a:t>
+            </a:r>
+            <a:endParaRPr sz="3200" dirty="0">
+              <a:latin typeface="HGSGothicE" panose="020B0900000000000000" pitchFamily="34" charset="-128"/>
+              <a:ea typeface="HGSGothicE" panose="020B0900000000000000" pitchFamily="34" charset="-128"/>
+            </a:endParaRPr>
           </a:p>
         </p:txBody>
       </p:sp>
@@ -3690,9 +3927,15 @@
   <p:cSld>
     <p:bg>
       <p:bgPr>
-        <a:solidFill>
-          <a:srgbClr val="FFFFFF"/>
-        </a:solidFill>
+        <a:blipFill dpi="0" rotWithShape="1">
+          <a:blip r:embed="rId2">
+            <a:lum/>
+          </a:blip>
+          <a:srcRect/>
+          <a:stretch>
+            <a:fillRect/>
+          </a:stretch>
+        </a:blipFill>
         <a:effectLst/>
       </p:bgPr>
     </p:bg>
@@ -3719,7 +3962,7 @@
         <p:spPr>
           <a:xfrm>
             <a:off x="457200" y="365760"/>
-            <a:ext cx="8229600" cy="640080"/>
+            <a:ext cx="2242922" cy="707886"/>
           </a:xfrm>
           <a:prstGeom prst="rect">
             <a:avLst/>
@@ -3736,8 +3979,16 @@
               <a:defRPr sz="4000" b="1"/>
             </a:pPr>
             <a:r>
+              <a:rPr dirty="0" err="1">
+                <a:latin typeface="HGMinchoE" panose="02020909000000000000" pitchFamily="49" charset="-128"/>
+                <a:ea typeface="HGMinchoE" panose="02020909000000000000" pitchFamily="49" charset="-128"/>
+              </a:rPr>
               <a:t>未來展望</a:t>
             </a:r>
+            <a:endParaRPr dirty="0">
+              <a:latin typeface="HGMinchoE" panose="02020909000000000000" pitchFamily="49" charset="-128"/>
+              <a:ea typeface="HGMinchoE" panose="02020909000000000000" pitchFamily="49" charset="-128"/>
+            </a:endParaRPr>
           </a:p>
         </p:txBody>
       </p:sp>
@@ -3750,7 +4001,7 @@
         <p:spPr>
           <a:xfrm>
             <a:off x="914400" y="1371600"/>
-            <a:ext cx="7315200" cy="5029200"/>
+            <a:ext cx="7315200" cy="3754874"/>
           </a:xfrm>
           <a:prstGeom prst="rect">
             <a:avLst/>
@@ -3763,7 +4014,7 @@
           </a:bodyPr>
           <a:lstStyle/>
           <a:p>
-            <a:endParaRPr/>
+            <a:endParaRPr dirty="0"/>
           </a:p>
           <a:p>
             <a:pPr>
@@ -3776,8 +4027,23 @@
               <a:defRPr sz="2200"/>
             </a:pPr>
             <a:r>
-              <a:t>• 擴充更多生理與行為特徵</a:t>
-            </a:r>
+              <a:rPr sz="3200" dirty="0">
+                <a:latin typeface="HGSGothicE" panose="020B0900000000000000" pitchFamily="34" charset="-128"/>
+                <a:ea typeface="HGSGothicE" panose="020B0900000000000000" pitchFamily="34" charset="-128"/>
+              </a:rPr>
+              <a:t>• </a:t>
+            </a:r>
+            <a:r>
+              <a:rPr sz="3200" dirty="0" err="1">
+                <a:latin typeface="HGSGothicE" panose="020B0900000000000000" pitchFamily="34" charset="-128"/>
+                <a:ea typeface="HGSGothicE" panose="020B0900000000000000" pitchFamily="34" charset="-128"/>
+              </a:rPr>
+              <a:t>擴充更多生理與行為特徵</a:t>
+            </a:r>
+            <a:endParaRPr sz="3200" dirty="0">
+              <a:latin typeface="HGSGothicE" panose="020B0900000000000000" pitchFamily="34" charset="-128"/>
+              <a:ea typeface="HGSGothicE" panose="020B0900000000000000" pitchFamily="34" charset="-128"/>
+            </a:endParaRPr>
           </a:p>
           <a:p>
             <a:pPr>
@@ -3790,8 +4056,23 @@
               <a:defRPr sz="2200"/>
             </a:pPr>
             <a:r>
-              <a:t>• 加入機器學習模型優化</a:t>
-            </a:r>
+              <a:rPr sz="3200" dirty="0">
+                <a:latin typeface="HGSGothicE" panose="020B0900000000000000" pitchFamily="34" charset="-128"/>
+                <a:ea typeface="HGSGothicE" panose="020B0900000000000000" pitchFamily="34" charset="-128"/>
+              </a:rPr>
+              <a:t>• </a:t>
+            </a:r>
+            <a:r>
+              <a:rPr sz="3200" dirty="0" err="1">
+                <a:latin typeface="HGSGothicE" panose="020B0900000000000000" pitchFamily="34" charset="-128"/>
+                <a:ea typeface="HGSGothicE" panose="020B0900000000000000" pitchFamily="34" charset="-128"/>
+              </a:rPr>
+              <a:t>加入機器學習模型優化</a:t>
+            </a:r>
+            <a:endParaRPr sz="3200" dirty="0">
+              <a:latin typeface="HGSGothicE" panose="020B0900000000000000" pitchFamily="34" charset="-128"/>
+              <a:ea typeface="HGSGothicE" panose="020B0900000000000000" pitchFamily="34" charset="-128"/>
+            </a:endParaRPr>
           </a:p>
           <a:p>
             <a:pPr>
@@ -3804,8 +4085,23 @@
               <a:defRPr sz="2200"/>
             </a:pPr>
             <a:r>
-              <a:t>• 支援多攝影機與多使用者</a:t>
-            </a:r>
+              <a:rPr sz="3200" dirty="0">
+                <a:latin typeface="HGSGothicE" panose="020B0900000000000000" pitchFamily="34" charset="-128"/>
+                <a:ea typeface="HGSGothicE" panose="020B0900000000000000" pitchFamily="34" charset="-128"/>
+              </a:rPr>
+              <a:t>• </a:t>
+            </a:r>
+            <a:r>
+              <a:rPr sz="3200" dirty="0" err="1">
+                <a:latin typeface="HGSGothicE" panose="020B0900000000000000" pitchFamily="34" charset="-128"/>
+                <a:ea typeface="HGSGothicE" panose="020B0900000000000000" pitchFamily="34" charset="-128"/>
+              </a:rPr>
+              <a:t>支援多攝影機與多使用者</a:t>
+            </a:r>
+            <a:endParaRPr sz="3200" dirty="0">
+              <a:latin typeface="HGSGothicE" panose="020B0900000000000000" pitchFamily="34" charset="-128"/>
+              <a:ea typeface="HGSGothicE" panose="020B0900000000000000" pitchFamily="34" charset="-128"/>
+            </a:endParaRPr>
           </a:p>
           <a:p>
             <a:pPr>
@@ -3818,8 +4114,23 @@
               <a:defRPr sz="2200"/>
             </a:pPr>
             <a:r>
-              <a:t>• 部署至邊緣運算設備</a:t>
-            </a:r>
+              <a:rPr sz="3200" dirty="0">
+                <a:latin typeface="HGSGothicE" panose="020B0900000000000000" pitchFamily="34" charset="-128"/>
+                <a:ea typeface="HGSGothicE" panose="020B0900000000000000" pitchFamily="34" charset="-128"/>
+              </a:rPr>
+              <a:t>• </a:t>
+            </a:r>
+            <a:r>
+              <a:rPr sz="3200" dirty="0" err="1">
+                <a:latin typeface="HGSGothicE" panose="020B0900000000000000" pitchFamily="34" charset="-128"/>
+                <a:ea typeface="HGSGothicE" panose="020B0900000000000000" pitchFamily="34" charset="-128"/>
+              </a:rPr>
+              <a:t>部署至邊緣運算設備</a:t>
+            </a:r>
+            <a:endParaRPr sz="3200" dirty="0">
+              <a:latin typeface="HGSGothicE" panose="020B0900000000000000" pitchFamily="34" charset="-128"/>
+              <a:ea typeface="HGSGothicE" panose="020B0900000000000000" pitchFamily="34" charset="-128"/>
+            </a:endParaRPr>
           </a:p>
           <a:p>
             <a:pPr>
@@ -3832,8 +4143,23 @@
               <a:defRPr sz="2200"/>
             </a:pPr>
             <a:r>
-              <a:t>• 實際任務環境驗證</a:t>
-            </a:r>
+              <a:rPr sz="3200" dirty="0">
+                <a:latin typeface="HGSGothicE" panose="020B0900000000000000" pitchFamily="34" charset="-128"/>
+                <a:ea typeface="HGSGothicE" panose="020B0900000000000000" pitchFamily="34" charset="-128"/>
+              </a:rPr>
+              <a:t>• </a:t>
+            </a:r>
+            <a:r>
+              <a:rPr sz="3200" dirty="0" err="1">
+                <a:latin typeface="HGSGothicE" panose="020B0900000000000000" pitchFamily="34" charset="-128"/>
+                <a:ea typeface="HGSGothicE" panose="020B0900000000000000" pitchFamily="34" charset="-128"/>
+              </a:rPr>
+              <a:t>實際任務環境驗證</a:t>
+            </a:r>
+            <a:endParaRPr sz="3200" dirty="0">
+              <a:latin typeface="HGSGothicE" panose="020B0900000000000000" pitchFamily="34" charset="-128"/>
+              <a:ea typeface="HGSGothicE" panose="020B0900000000000000" pitchFamily="34" charset="-128"/>
+            </a:endParaRPr>
           </a:p>
         </p:txBody>
       </p:sp>
@@ -3850,9 +4176,15 @@
   <p:cSld>
     <p:bg>
       <p:bgPr>
-        <a:solidFill>
-          <a:srgbClr val="FFFFFF"/>
-        </a:solidFill>
+        <a:blipFill dpi="0" rotWithShape="1">
+          <a:blip r:embed="rId2">
+            <a:lum/>
+          </a:blip>
+          <a:srcRect/>
+          <a:stretch>
+            <a:fillRect/>
+          </a:stretch>
+        </a:blipFill>
         <a:effectLst/>
       </p:bgPr>
     </p:bg>
@@ -3879,7 +4211,7 @@
         <p:spPr>
           <a:xfrm>
             <a:off x="457200" y="365760"/>
-            <a:ext cx="8229600" cy="640080"/>
+            <a:ext cx="2242922" cy="707886"/>
           </a:xfrm>
           <a:prstGeom prst="rect">
             <a:avLst/>
@@ -3896,8 +4228,16 @@
               <a:defRPr sz="4000" b="1"/>
             </a:pPr>
             <a:r>
+              <a:rPr dirty="0" err="1">
+                <a:latin typeface="HGMinchoE" panose="02020909000000000000" pitchFamily="49" charset="-128"/>
+                <a:ea typeface="HGMinchoE" panose="02020909000000000000" pitchFamily="49" charset="-128"/>
+              </a:rPr>
               <a:t>參考資料</a:t>
             </a:r>
+            <a:endParaRPr dirty="0">
+              <a:latin typeface="HGMinchoE" panose="02020909000000000000" pitchFamily="49" charset="-128"/>
+              <a:ea typeface="HGMinchoE" panose="02020909000000000000" pitchFamily="49" charset="-128"/>
+            </a:endParaRPr>
           </a:p>
         </p:txBody>
       </p:sp>
@@ -3910,7 +4250,7 @@
         <p:spPr>
           <a:xfrm>
             <a:off x="914400" y="1371600"/>
-            <a:ext cx="7315200" cy="5029200"/>
+            <a:ext cx="7315200" cy="3970318"/>
           </a:xfrm>
           <a:prstGeom prst="rect">
             <a:avLst/>
@@ -3923,7 +4263,7 @@
           </a:bodyPr>
           <a:lstStyle/>
           <a:p>
-            <a:endParaRPr/>
+            <a:endParaRPr sz="3200" dirty="0"/>
           </a:p>
           <a:p>
             <a:pPr>
@@ -3936,8 +4276,37 @@
               <a:defRPr sz="2200"/>
             </a:pPr>
             <a:r>
-              <a:t>• Google MediaPipe Face Landmarker</a:t>
-            </a:r>
+              <a:rPr sz="3200" dirty="0">
+                <a:latin typeface="HGSGothicE" panose="020B0900000000000000" pitchFamily="34" charset="-128"/>
+                <a:ea typeface="HGSGothicE" panose="020B0900000000000000" pitchFamily="34" charset="-128"/>
+              </a:rPr>
+              <a:t>• Google </a:t>
+            </a:r>
+            <a:r>
+              <a:rPr sz="3200" dirty="0" err="1">
+                <a:latin typeface="HGSGothicE" panose="020B0900000000000000" pitchFamily="34" charset="-128"/>
+                <a:ea typeface="HGSGothicE" panose="020B0900000000000000" pitchFamily="34" charset="-128"/>
+              </a:rPr>
+              <a:t>MediaPipe</a:t>
+            </a:r>
+            <a:r>
+              <a:rPr sz="3200" dirty="0">
+                <a:latin typeface="HGSGothicE" panose="020B0900000000000000" pitchFamily="34" charset="-128"/>
+                <a:ea typeface="HGSGothicE" panose="020B0900000000000000" pitchFamily="34" charset="-128"/>
+              </a:rPr>
+              <a:t> Face </a:t>
+            </a:r>
+            <a:r>
+              <a:rPr sz="3200" dirty="0" err="1">
+                <a:latin typeface="HGSGothicE" panose="020B0900000000000000" pitchFamily="34" charset="-128"/>
+                <a:ea typeface="HGSGothicE" panose="020B0900000000000000" pitchFamily="34" charset="-128"/>
+              </a:rPr>
+              <a:t>Landmarker</a:t>
+            </a:r>
+            <a:endParaRPr sz="3200" dirty="0">
+              <a:latin typeface="HGSGothicE" panose="020B0900000000000000" pitchFamily="34" charset="-128"/>
+              <a:ea typeface="HGSGothicE" panose="020B0900000000000000" pitchFamily="34" charset="-128"/>
+            </a:endParaRPr>
           </a:p>
           <a:p>
             <a:pPr>
@@ -3950,6 +4319,10 @@
               <a:defRPr sz="2200"/>
             </a:pPr>
             <a:r>
+              <a:rPr sz="3200" dirty="0">
+                <a:latin typeface="HGSGothicE" panose="020B0900000000000000" pitchFamily="34" charset="-128"/>
+                <a:ea typeface="HGSGothicE" panose="020B0900000000000000" pitchFamily="34" charset="-128"/>
+              </a:rPr>
               <a:t>• OpenCV Documentation</a:t>
             </a:r>
           </a:p>
@@ -3964,7 +4337,25 @@
               <a:defRPr sz="2200"/>
             </a:pPr>
             <a:r>
-              <a:t>• Flask-SocketIO Framework</a:t>
+              <a:rPr sz="3200" dirty="0">
+                <a:latin typeface="HGSGothicE" panose="020B0900000000000000" pitchFamily="34" charset="-128"/>
+                <a:ea typeface="HGSGothicE" panose="020B0900000000000000" pitchFamily="34" charset="-128"/>
+              </a:rPr>
+              <a:t>• Flask-</a:t>
+            </a:r>
+            <a:r>
+              <a:rPr sz="3200" dirty="0" err="1">
+                <a:latin typeface="HGSGothicE" panose="020B0900000000000000" pitchFamily="34" charset="-128"/>
+                <a:ea typeface="HGSGothicE" panose="020B0900000000000000" pitchFamily="34" charset="-128"/>
+              </a:rPr>
+              <a:t>SocketIO</a:t>
+            </a:r>
+            <a:r>
+              <a:rPr sz="3200" dirty="0">
+                <a:latin typeface="HGSGothicE" panose="020B0900000000000000" pitchFamily="34" charset="-128"/>
+                <a:ea typeface="HGSGothicE" panose="020B0900000000000000" pitchFamily="34" charset="-128"/>
+              </a:rPr>
+              <a:t> Framework</a:t>
             </a:r>
           </a:p>
           <a:p>
@@ -3978,8 +4369,37 @@
               <a:defRPr sz="2200"/>
             </a:pPr>
             <a:r>
-              <a:t>• rPPG 與疲勞偵測相關論文</a:t>
-            </a:r>
+              <a:rPr sz="3200" dirty="0">
+                <a:latin typeface="HGSGothicE" panose="020B0900000000000000" pitchFamily="34" charset="-128"/>
+                <a:ea typeface="HGSGothicE" panose="020B0900000000000000" pitchFamily="34" charset="-128"/>
+              </a:rPr>
+              <a:t>• </a:t>
+            </a:r>
+            <a:r>
+              <a:rPr sz="3200" dirty="0" err="1">
+                <a:latin typeface="HGSGothicE" panose="020B0900000000000000" pitchFamily="34" charset="-128"/>
+                <a:ea typeface="HGSGothicE" panose="020B0900000000000000" pitchFamily="34" charset="-128"/>
+              </a:rPr>
+              <a:t>rPPG</a:t>
+            </a:r>
+            <a:r>
+              <a:rPr sz="3200" dirty="0">
+                <a:latin typeface="HGSGothicE" panose="020B0900000000000000" pitchFamily="34" charset="-128"/>
+                <a:ea typeface="HGSGothicE" panose="020B0900000000000000" pitchFamily="34" charset="-128"/>
+              </a:rPr>
+              <a:t> </a:t>
+            </a:r>
+            <a:r>
+              <a:rPr sz="3200" dirty="0" err="1">
+                <a:latin typeface="HGSGothicE" panose="020B0900000000000000" pitchFamily="34" charset="-128"/>
+                <a:ea typeface="HGSGothicE" panose="020B0900000000000000" pitchFamily="34" charset="-128"/>
+              </a:rPr>
+              <a:t>與疲勞偵測相關論文</a:t>
+            </a:r>
+            <a:endParaRPr sz="3200" dirty="0">
+              <a:latin typeface="HGSGothicE" panose="020B0900000000000000" pitchFamily="34" charset="-128"/>
+              <a:ea typeface="HGSGothicE" panose="020B0900000000000000" pitchFamily="34" charset="-128"/>
+            </a:endParaRPr>
           </a:p>
           <a:p>
             <a:pPr>
@@ -3992,6 +4412,10 @@
               <a:defRPr sz="2200"/>
             </a:pPr>
             <a:r>
+              <a:rPr sz="3200" dirty="0">
+                <a:latin typeface="HGSGothicE" panose="020B0900000000000000" pitchFamily="34" charset="-128"/>
+                <a:ea typeface="HGSGothicE" panose="020B0900000000000000" pitchFamily="34" charset="-128"/>
+              </a:rPr>
               <a:t>• Qt for Python (PySide6)</a:t>
             </a:r>
           </a:p>
@@ -4010,9 +4434,15 @@
   <p:cSld>
     <p:bg>
       <p:bgPr>
-        <a:solidFill>
-          <a:srgbClr val="FFFFFF"/>
-        </a:solidFill>
+        <a:blipFill dpi="0" rotWithShape="1">
+          <a:blip r:embed="rId2">
+            <a:lum/>
+          </a:blip>
+          <a:srcRect/>
+          <a:stretch>
+            <a:fillRect/>
+          </a:stretch>
+        </a:blipFill>
         <a:effectLst/>
       </p:bgPr>
     </p:bg>
@@ -4039,7 +4469,7 @@
         <p:spPr>
           <a:xfrm>
             <a:off x="457200" y="365760"/>
-            <a:ext cx="8229600" cy="640080"/>
+            <a:ext cx="2242922" cy="707886"/>
           </a:xfrm>
           <a:prstGeom prst="rect">
             <a:avLst/>
@@ -4056,8 +4486,16 @@
               <a:defRPr sz="4000" b="1"/>
             </a:pPr>
             <a:r>
+              <a:rPr dirty="0" err="1">
+                <a:latin typeface="HGMinchoE" panose="02020909000000000000" pitchFamily="49" charset="-128"/>
+                <a:ea typeface="HGMinchoE" panose="02020909000000000000" pitchFamily="49" charset="-128"/>
+              </a:rPr>
               <a:t>研究動機</a:t>
             </a:r>
+            <a:endParaRPr dirty="0">
+              <a:latin typeface="HGMinchoE" panose="02020909000000000000" pitchFamily="49" charset="-128"/>
+              <a:ea typeface="HGMinchoE" panose="02020909000000000000" pitchFamily="49" charset="-128"/>
+            </a:endParaRPr>
           </a:p>
         </p:txBody>
       </p:sp>
@@ -4070,7 +4508,7 @@
         <p:spPr>
           <a:xfrm>
             <a:off x="914400" y="1371600"/>
-            <a:ext cx="7315200" cy="5029200"/>
+            <a:ext cx="7315200" cy="3057247"/>
           </a:xfrm>
           <a:prstGeom prst="rect">
             <a:avLst/>
@@ -4083,7 +4521,7 @@
           </a:bodyPr>
           <a:lstStyle/>
           <a:p>
-            <a:endParaRPr/>
+            <a:endParaRPr dirty="0"/>
           </a:p>
           <a:p>
             <a:pPr>
@@ -4096,8 +4534,23 @@
               <a:defRPr sz="2200"/>
             </a:pPr>
             <a:r>
-              <a:t>• 海上任務長時間待勤、環境單調</a:t>
-            </a:r>
+              <a:rPr sz="3200" dirty="0">
+                <a:latin typeface="HGSGothicE" panose="020B0900000000000000" pitchFamily="34" charset="-128"/>
+                <a:ea typeface="HGSGothicE" panose="020B0900000000000000" pitchFamily="34" charset="-128"/>
+              </a:rPr>
+              <a:t>• </a:t>
+            </a:r>
+            <a:r>
+              <a:rPr sz="3200" dirty="0" err="1">
+                <a:latin typeface="HGSGothicE" panose="020B0900000000000000" pitchFamily="34" charset="-128"/>
+                <a:ea typeface="HGSGothicE" panose="020B0900000000000000" pitchFamily="34" charset="-128"/>
+              </a:rPr>
+              <a:t>海上任務長時間待勤、環境單調</a:t>
+            </a:r>
+            <a:endParaRPr sz="3200" dirty="0">
+              <a:latin typeface="HGSGothicE" panose="020B0900000000000000" pitchFamily="34" charset="-128"/>
+              <a:ea typeface="HGSGothicE" panose="020B0900000000000000" pitchFamily="34" charset="-128"/>
+            </a:endParaRPr>
           </a:p>
           <a:p>
             <a:pPr>
@@ -4110,8 +4563,37 @@
               <a:defRPr sz="2200"/>
             </a:pPr>
             <a:r>
-              <a:t>• 駕駛員容易產生疲勞、注意力下降</a:t>
-            </a:r>
+              <a:rPr sz="3200" dirty="0">
+                <a:latin typeface="HGSGothicE" panose="020B0900000000000000" pitchFamily="34" charset="-128"/>
+                <a:ea typeface="HGSGothicE" panose="020B0900000000000000" pitchFamily="34" charset="-128"/>
+              </a:rPr>
+              <a:t>• </a:t>
+            </a:r>
+            <a:r>
+              <a:rPr sz="3200" dirty="0" err="1">
+                <a:latin typeface="HGSGothicE" panose="020B0900000000000000" pitchFamily="34" charset="-128"/>
+                <a:ea typeface="HGSGothicE" panose="020B0900000000000000" pitchFamily="34" charset="-128"/>
+              </a:rPr>
+              <a:t>駕駛員容易</a:t>
+            </a:r>
+            <a:r>
+              <a:rPr lang="zh-TW" altLang="en-US" sz="3200" dirty="0">
+                <a:latin typeface="HGSGothicE" panose="020B0900000000000000" pitchFamily="34" charset="-128"/>
+                <a:ea typeface="HGSGothicE" panose="020B0900000000000000" pitchFamily="34" charset="-128"/>
+              </a:rPr>
+              <a:t>產</a:t>
+            </a:r>
+            <a:r>
+              <a:rPr sz="3200" dirty="0" err="1">
+                <a:latin typeface="HGSGothicE" panose="020B0900000000000000" pitchFamily="34" charset="-128"/>
+                <a:ea typeface="HGSGothicE" panose="020B0900000000000000" pitchFamily="34" charset="-128"/>
+              </a:rPr>
+              <a:t>生疲勞、注意力下降</a:t>
+            </a:r>
+            <a:endParaRPr sz="3200" dirty="0">
+              <a:latin typeface="HGSGothicE" panose="020B0900000000000000" pitchFamily="34" charset="-128"/>
+              <a:ea typeface="HGSGothicE" panose="020B0900000000000000" pitchFamily="34" charset="-128"/>
+            </a:endParaRPr>
           </a:p>
           <a:p>
             <a:pPr>
@@ -4124,8 +4606,23 @@
               <a:defRPr sz="2200"/>
             </a:pPr>
             <a:r>
-              <a:t>• 缺乏即時監測與警示輔助機制</a:t>
-            </a:r>
+              <a:rPr sz="3200" dirty="0">
+                <a:latin typeface="HGSGothicE" panose="020B0900000000000000" pitchFamily="34" charset="-128"/>
+                <a:ea typeface="HGSGothicE" panose="020B0900000000000000" pitchFamily="34" charset="-128"/>
+              </a:rPr>
+              <a:t>• </a:t>
+            </a:r>
+            <a:r>
+              <a:rPr sz="3200" dirty="0" err="1">
+                <a:latin typeface="HGSGothicE" panose="020B0900000000000000" pitchFamily="34" charset="-128"/>
+                <a:ea typeface="HGSGothicE" panose="020B0900000000000000" pitchFamily="34" charset="-128"/>
+              </a:rPr>
+              <a:t>缺乏即時監測與警示輔助機制</a:t>
+            </a:r>
+            <a:endParaRPr sz="3200" dirty="0">
+              <a:latin typeface="HGSGothicE" panose="020B0900000000000000" pitchFamily="34" charset="-128"/>
+              <a:ea typeface="HGSGothicE" panose="020B0900000000000000" pitchFamily="34" charset="-128"/>
+            </a:endParaRPr>
           </a:p>
           <a:p>
             <a:pPr>
@@ -4138,8 +4635,23 @@
               <a:defRPr sz="2200"/>
             </a:pPr>
             <a:r>
-              <a:t>• 需要一套自動化疲勞偵測系統</a:t>
-            </a:r>
+              <a:rPr sz="3200" dirty="0">
+                <a:latin typeface="HGSGothicE" panose="020B0900000000000000" pitchFamily="34" charset="-128"/>
+                <a:ea typeface="HGSGothicE" panose="020B0900000000000000" pitchFamily="34" charset="-128"/>
+              </a:rPr>
+              <a:t>• </a:t>
+            </a:r>
+            <a:r>
+              <a:rPr sz="3200" dirty="0" err="1">
+                <a:latin typeface="HGSGothicE" panose="020B0900000000000000" pitchFamily="34" charset="-128"/>
+                <a:ea typeface="HGSGothicE" panose="020B0900000000000000" pitchFamily="34" charset="-128"/>
+              </a:rPr>
+              <a:t>需要一套自動化疲勞偵測系統</a:t>
+            </a:r>
+            <a:endParaRPr sz="3200" dirty="0">
+              <a:latin typeface="HGSGothicE" panose="020B0900000000000000" pitchFamily="34" charset="-128"/>
+              <a:ea typeface="HGSGothicE" panose="020B0900000000000000" pitchFamily="34" charset="-128"/>
+            </a:endParaRPr>
           </a:p>
         </p:txBody>
       </p:sp>
@@ -4156,9 +4668,15 @@
   <p:cSld>
     <p:bg>
       <p:bgPr>
-        <a:solidFill>
-          <a:srgbClr val="FFFFFF"/>
-        </a:solidFill>
+        <a:blipFill dpi="0" rotWithShape="1">
+          <a:blip r:embed="rId2">
+            <a:lum/>
+          </a:blip>
+          <a:srcRect/>
+          <a:stretch>
+            <a:fillRect/>
+          </a:stretch>
+        </a:blipFill>
         <a:effectLst/>
       </p:bgPr>
     </p:bg>
@@ -4185,7 +4703,7 @@
         <p:spPr>
           <a:xfrm>
             <a:off x="457200" y="365760"/>
-            <a:ext cx="8229600" cy="640080"/>
+            <a:ext cx="2242922" cy="707886"/>
           </a:xfrm>
           <a:prstGeom prst="rect">
             <a:avLst/>
@@ -4202,8 +4720,16 @@
               <a:defRPr sz="4000" b="1"/>
             </a:pPr>
             <a:r>
+              <a:rPr dirty="0" err="1">
+                <a:latin typeface="HGMinchoE" panose="02020909000000000000" pitchFamily="49" charset="-128"/>
+                <a:ea typeface="HGMinchoE" panose="02020909000000000000" pitchFamily="49" charset="-128"/>
+              </a:rPr>
               <a:t>研究目標</a:t>
             </a:r>
+            <a:endParaRPr dirty="0">
+              <a:latin typeface="HGMinchoE" panose="02020909000000000000" pitchFamily="49" charset="-128"/>
+              <a:ea typeface="HGMinchoE" panose="02020909000000000000" pitchFamily="49" charset="-128"/>
+            </a:endParaRPr>
           </a:p>
         </p:txBody>
       </p:sp>
@@ -4216,7 +4742,7 @@
         <p:spPr>
           <a:xfrm>
             <a:off x="914400" y="1371600"/>
-            <a:ext cx="7315200" cy="5029200"/>
+            <a:ext cx="7315200" cy="3057247"/>
           </a:xfrm>
           <a:prstGeom prst="rect">
             <a:avLst/>
@@ -4229,7 +4755,7 @@
           </a:bodyPr>
           <a:lstStyle/>
           <a:p>
-            <a:endParaRPr/>
+            <a:endParaRPr dirty="0"/>
           </a:p>
           <a:p>
             <a:pPr>
@@ -4242,8 +4768,23 @@
               <a:defRPr sz="2200"/>
             </a:pPr>
             <a:r>
-              <a:t>• 建立可即時運作的疲勞偵測原型</a:t>
-            </a:r>
+              <a:rPr sz="3200" dirty="0">
+                <a:latin typeface="HGSGothicE" panose="020B0900000000000000" pitchFamily="34" charset="-128"/>
+                <a:ea typeface="HGSGothicE" panose="020B0900000000000000" pitchFamily="34" charset="-128"/>
+              </a:rPr>
+              <a:t>• </a:t>
+            </a:r>
+            <a:r>
+              <a:rPr sz="3200" dirty="0" err="1">
+                <a:latin typeface="HGSGothicE" panose="020B0900000000000000" pitchFamily="34" charset="-128"/>
+                <a:ea typeface="HGSGothicE" panose="020B0900000000000000" pitchFamily="34" charset="-128"/>
+              </a:rPr>
+              <a:t>建立可即時運作的疲勞偵測原型</a:t>
+            </a:r>
+            <a:endParaRPr sz="3200" dirty="0">
+              <a:latin typeface="HGSGothicE" panose="020B0900000000000000" pitchFamily="34" charset="-128"/>
+              <a:ea typeface="HGSGothicE" panose="020B0900000000000000" pitchFamily="34" charset="-128"/>
+            </a:endParaRPr>
           </a:p>
           <a:p>
             <a:pPr>
@@ -4256,8 +4797,23 @@
               <a:defRPr sz="2200"/>
             </a:pPr>
             <a:r>
-              <a:t>• 整合影像、關鍵點、生理訊號分析</a:t>
-            </a:r>
+              <a:rPr sz="3200" dirty="0">
+                <a:latin typeface="HGSGothicE" panose="020B0900000000000000" pitchFamily="34" charset="-128"/>
+                <a:ea typeface="HGSGothicE" panose="020B0900000000000000" pitchFamily="34" charset="-128"/>
+              </a:rPr>
+              <a:t>• </a:t>
+            </a:r>
+            <a:r>
+              <a:rPr sz="3200" dirty="0" err="1">
+                <a:latin typeface="HGSGothicE" panose="020B0900000000000000" pitchFamily="34" charset="-128"/>
+                <a:ea typeface="HGSGothicE" panose="020B0900000000000000" pitchFamily="34" charset="-128"/>
+              </a:rPr>
+              <a:t>整合影像、關鍵點、生理訊號分析</a:t>
+            </a:r>
+            <a:endParaRPr sz="3200" dirty="0">
+              <a:latin typeface="HGSGothicE" panose="020B0900000000000000" pitchFamily="34" charset="-128"/>
+              <a:ea typeface="HGSGothicE" panose="020B0900000000000000" pitchFamily="34" charset="-128"/>
+            </a:endParaRPr>
           </a:p>
           <a:p>
             <a:pPr>
@@ -4270,8 +4826,23 @@
               <a:defRPr sz="2200"/>
             </a:pPr>
             <a:r>
-              <a:t>• 提供操作介面與警示顯示</a:t>
-            </a:r>
+              <a:rPr sz="3200" dirty="0">
+                <a:latin typeface="HGSGothicE" panose="020B0900000000000000" pitchFamily="34" charset="-128"/>
+                <a:ea typeface="HGSGothicE" panose="020B0900000000000000" pitchFamily="34" charset="-128"/>
+              </a:rPr>
+              <a:t>• </a:t>
+            </a:r>
+            <a:r>
+              <a:rPr sz="3200" dirty="0" err="1">
+                <a:latin typeface="HGSGothicE" panose="020B0900000000000000" pitchFamily="34" charset="-128"/>
+                <a:ea typeface="HGSGothicE" panose="020B0900000000000000" pitchFamily="34" charset="-128"/>
+              </a:rPr>
+              <a:t>提供操作介面與警示顯示</a:t>
+            </a:r>
+            <a:endParaRPr sz="3200" dirty="0">
+              <a:latin typeface="HGSGothicE" panose="020B0900000000000000" pitchFamily="34" charset="-128"/>
+              <a:ea typeface="HGSGothicE" panose="020B0900000000000000" pitchFamily="34" charset="-128"/>
+            </a:endParaRPr>
           </a:p>
           <a:p>
             <a:pPr>
@@ -4284,8 +4855,23 @@
               <a:defRPr sz="2200"/>
             </a:pPr>
             <a:r>
-              <a:t>• 評估系統準確性與穩定度</a:t>
-            </a:r>
+              <a:rPr sz="3200" dirty="0">
+                <a:latin typeface="HGSGothicE" panose="020B0900000000000000" pitchFamily="34" charset="-128"/>
+                <a:ea typeface="HGSGothicE" panose="020B0900000000000000" pitchFamily="34" charset="-128"/>
+              </a:rPr>
+              <a:t>• </a:t>
+            </a:r>
+            <a:r>
+              <a:rPr sz="3200" dirty="0" err="1">
+                <a:latin typeface="HGSGothicE" panose="020B0900000000000000" pitchFamily="34" charset="-128"/>
+                <a:ea typeface="HGSGothicE" panose="020B0900000000000000" pitchFamily="34" charset="-128"/>
+              </a:rPr>
+              <a:t>評估系統準確性與穩定度</a:t>
+            </a:r>
+            <a:endParaRPr sz="3200" dirty="0">
+              <a:latin typeface="HGSGothicE" panose="020B0900000000000000" pitchFamily="34" charset="-128"/>
+              <a:ea typeface="HGSGothicE" panose="020B0900000000000000" pitchFamily="34" charset="-128"/>
+            </a:endParaRPr>
           </a:p>
         </p:txBody>
       </p:sp>
@@ -4302,9 +4888,15 @@
   <p:cSld>
     <p:bg>
       <p:bgPr>
-        <a:solidFill>
-          <a:srgbClr val="FFFFFF"/>
-        </a:solidFill>
+        <a:blipFill dpi="0" rotWithShape="1">
+          <a:blip r:embed="rId2">
+            <a:lum/>
+          </a:blip>
+          <a:srcRect/>
+          <a:stretch>
+            <a:fillRect/>
+          </a:stretch>
+        </a:blipFill>
         <a:effectLst/>
       </p:bgPr>
     </p:bg>
@@ -4331,7 +4923,7 @@
         <p:spPr>
           <a:xfrm>
             <a:off x="457200" y="365760"/>
-            <a:ext cx="8229600" cy="640080"/>
+            <a:ext cx="2242922" cy="707886"/>
           </a:xfrm>
           <a:prstGeom prst="rect">
             <a:avLst/>
@@ -4348,8 +4940,16 @@
               <a:defRPr sz="4000" b="1"/>
             </a:pPr>
             <a:r>
+              <a:rPr dirty="0" err="1">
+                <a:latin typeface="HGMinchoE" panose="02020909000000000000" pitchFamily="49" charset="-128"/>
+                <a:ea typeface="HGMinchoE" panose="02020909000000000000" pitchFamily="49" charset="-128"/>
+              </a:rPr>
               <a:t>系統架構</a:t>
             </a:r>
+            <a:endParaRPr dirty="0">
+              <a:latin typeface="HGMinchoE" panose="02020909000000000000" pitchFamily="49" charset="-128"/>
+              <a:ea typeface="HGMinchoE" panose="02020909000000000000" pitchFamily="49" charset="-128"/>
+            </a:endParaRPr>
           </a:p>
         </p:txBody>
       </p:sp>
@@ -4362,7 +4962,7 @@
         <p:spPr>
           <a:xfrm>
             <a:off x="914400" y="1371600"/>
-            <a:ext cx="7315200" cy="5029200"/>
+            <a:ext cx="7315200" cy="3754874"/>
           </a:xfrm>
           <a:prstGeom prst="rect">
             <a:avLst/>
@@ -4375,7 +4975,7 @@
           </a:bodyPr>
           <a:lstStyle/>
           <a:p>
-            <a:endParaRPr/>
+            <a:endParaRPr dirty="0"/>
           </a:p>
           <a:p>
             <a:pPr>
@@ -4388,8 +4988,51 @@
               <a:defRPr sz="2200"/>
             </a:pPr>
             <a:r>
-              <a:t>• 攝影機擷取 → MediaPipe 臉部偵測</a:t>
-            </a:r>
+              <a:rPr sz="3200" dirty="0">
+                <a:latin typeface="HGSGothicE" panose="020B0900000000000000" pitchFamily="34" charset="-128"/>
+                <a:ea typeface="HGSGothicE" panose="020B0900000000000000" pitchFamily="34" charset="-128"/>
+              </a:rPr>
+              <a:t>• </a:t>
+            </a:r>
+            <a:r>
+              <a:rPr sz="3200" dirty="0" err="1">
+                <a:latin typeface="HGSGothicE" panose="020B0900000000000000" pitchFamily="34" charset="-128"/>
+                <a:ea typeface="HGSGothicE" panose="020B0900000000000000" pitchFamily="34" charset="-128"/>
+              </a:rPr>
+              <a:t>攝影機擷取</a:t>
+            </a:r>
+            <a:r>
+              <a:rPr sz="3200" dirty="0">
+                <a:latin typeface="HGSGothicE" panose="020B0900000000000000" pitchFamily="34" charset="-128"/>
+                <a:ea typeface="HGSGothicE" panose="020B0900000000000000" pitchFamily="34" charset="-128"/>
+              </a:rPr>
+              <a:t> → </a:t>
+            </a:r>
+            <a:r>
+              <a:rPr sz="3200" dirty="0" err="1">
+                <a:latin typeface="HGSGothicE" panose="020B0900000000000000" pitchFamily="34" charset="-128"/>
+                <a:ea typeface="HGSGothicE" panose="020B0900000000000000" pitchFamily="34" charset="-128"/>
+              </a:rPr>
+              <a:t>MediaPipe</a:t>
+            </a:r>
+            <a:r>
+              <a:rPr sz="3200" dirty="0">
+                <a:latin typeface="HGSGothicE" panose="020B0900000000000000" pitchFamily="34" charset="-128"/>
+                <a:ea typeface="HGSGothicE" panose="020B0900000000000000" pitchFamily="34" charset="-128"/>
+              </a:rPr>
+              <a:t> </a:t>
+            </a:r>
+            <a:r>
+              <a:rPr sz="3200" dirty="0" err="1">
+                <a:latin typeface="HGSGothicE" panose="020B0900000000000000" pitchFamily="34" charset="-128"/>
+                <a:ea typeface="HGSGothicE" panose="020B0900000000000000" pitchFamily="34" charset="-128"/>
+              </a:rPr>
+              <a:t>臉部偵測</a:t>
+            </a:r>
+            <a:endParaRPr sz="3200" dirty="0">
+              <a:latin typeface="HGSGothicE" panose="020B0900000000000000" pitchFamily="34" charset="-128"/>
+              <a:ea typeface="HGSGothicE" panose="020B0900000000000000" pitchFamily="34" charset="-128"/>
+            </a:endParaRPr>
           </a:p>
           <a:p>
             <a:pPr>
@@ -4402,8 +5045,51 @@
               <a:defRPr sz="2200"/>
             </a:pPr>
             <a:r>
-              <a:t>• 疲勞特徵分析 → rPPG 生理訊號估測</a:t>
-            </a:r>
+              <a:rPr sz="3200" dirty="0">
+                <a:latin typeface="HGSGothicE" panose="020B0900000000000000" pitchFamily="34" charset="-128"/>
+                <a:ea typeface="HGSGothicE" panose="020B0900000000000000" pitchFamily="34" charset="-128"/>
+              </a:rPr>
+              <a:t>• </a:t>
+            </a:r>
+            <a:r>
+              <a:rPr sz="3200" dirty="0" err="1">
+                <a:latin typeface="HGSGothicE" panose="020B0900000000000000" pitchFamily="34" charset="-128"/>
+                <a:ea typeface="HGSGothicE" panose="020B0900000000000000" pitchFamily="34" charset="-128"/>
+              </a:rPr>
+              <a:t>疲勞特徵分析</a:t>
+            </a:r>
+            <a:r>
+              <a:rPr sz="3200" dirty="0">
+                <a:latin typeface="HGSGothicE" panose="020B0900000000000000" pitchFamily="34" charset="-128"/>
+                <a:ea typeface="HGSGothicE" panose="020B0900000000000000" pitchFamily="34" charset="-128"/>
+              </a:rPr>
+              <a:t> → </a:t>
+            </a:r>
+            <a:r>
+              <a:rPr sz="3200" dirty="0" err="1">
+                <a:latin typeface="HGSGothicE" panose="020B0900000000000000" pitchFamily="34" charset="-128"/>
+                <a:ea typeface="HGSGothicE" panose="020B0900000000000000" pitchFamily="34" charset="-128"/>
+              </a:rPr>
+              <a:t>rPPG</a:t>
+            </a:r>
+            <a:r>
+              <a:rPr sz="3200" dirty="0">
+                <a:latin typeface="HGSGothicE" panose="020B0900000000000000" pitchFamily="34" charset="-128"/>
+                <a:ea typeface="HGSGothicE" panose="020B0900000000000000" pitchFamily="34" charset="-128"/>
+              </a:rPr>
+              <a:t> </a:t>
+            </a:r>
+            <a:r>
+              <a:rPr sz="3200" dirty="0" err="1">
+                <a:latin typeface="HGSGothicE" panose="020B0900000000000000" pitchFamily="34" charset="-128"/>
+                <a:ea typeface="HGSGothicE" panose="020B0900000000000000" pitchFamily="34" charset="-128"/>
+              </a:rPr>
+              <a:t>生理訊號估測</a:t>
+            </a:r>
+            <a:endParaRPr sz="3200" dirty="0">
+              <a:latin typeface="HGSGothicE" panose="020B0900000000000000" pitchFamily="34" charset="-128"/>
+              <a:ea typeface="HGSGothicE" panose="020B0900000000000000" pitchFamily="34" charset="-128"/>
+            </a:endParaRPr>
           </a:p>
           <a:p>
             <a:pPr>
@@ -4416,8 +5102,37 @@
               <a:defRPr sz="2200"/>
             </a:pPr>
             <a:r>
-              <a:t>• 疲勞評分模型 → 實時狀態判定</a:t>
-            </a:r>
+              <a:rPr sz="3200" dirty="0">
+                <a:latin typeface="HGSGothicE" panose="020B0900000000000000" pitchFamily="34" charset="-128"/>
+                <a:ea typeface="HGSGothicE" panose="020B0900000000000000" pitchFamily="34" charset="-128"/>
+              </a:rPr>
+              <a:t>• </a:t>
+            </a:r>
+            <a:r>
+              <a:rPr sz="3200" dirty="0" err="1">
+                <a:latin typeface="HGSGothicE" panose="020B0900000000000000" pitchFamily="34" charset="-128"/>
+                <a:ea typeface="HGSGothicE" panose="020B0900000000000000" pitchFamily="34" charset="-128"/>
+              </a:rPr>
+              <a:t>疲勞評分模型</a:t>
+            </a:r>
+            <a:r>
+              <a:rPr sz="3200" dirty="0">
+                <a:latin typeface="HGSGothicE" panose="020B0900000000000000" pitchFamily="34" charset="-128"/>
+                <a:ea typeface="HGSGothicE" panose="020B0900000000000000" pitchFamily="34" charset="-128"/>
+              </a:rPr>
+              <a:t> → </a:t>
+            </a:r>
+            <a:r>
+              <a:rPr sz="3200" dirty="0" err="1">
+                <a:latin typeface="HGSGothicE" panose="020B0900000000000000" pitchFamily="34" charset="-128"/>
+                <a:ea typeface="HGSGothicE" panose="020B0900000000000000" pitchFamily="34" charset="-128"/>
+              </a:rPr>
+              <a:t>實時狀態判定</a:t>
+            </a:r>
+            <a:endParaRPr sz="3200" dirty="0">
+              <a:latin typeface="HGSGothicE" panose="020B0900000000000000" pitchFamily="34" charset="-128"/>
+              <a:ea typeface="HGSGothicE" panose="020B0900000000000000" pitchFamily="34" charset="-128"/>
+            </a:endParaRPr>
           </a:p>
           <a:p>
             <a:pPr>
@@ -4430,8 +5145,37 @@
               <a:defRPr sz="2200"/>
             </a:pPr>
             <a:r>
-              <a:t>• 桌面控制台 + Web 儀表板顯示</a:t>
-            </a:r>
+              <a:rPr sz="3200" dirty="0">
+                <a:latin typeface="HGSGothicE" panose="020B0900000000000000" pitchFamily="34" charset="-128"/>
+                <a:ea typeface="HGSGothicE" panose="020B0900000000000000" pitchFamily="34" charset="-128"/>
+              </a:rPr>
+              <a:t>• </a:t>
+            </a:r>
+            <a:r>
+              <a:rPr sz="3200" dirty="0" err="1">
+                <a:latin typeface="HGSGothicE" panose="020B0900000000000000" pitchFamily="34" charset="-128"/>
+                <a:ea typeface="HGSGothicE" panose="020B0900000000000000" pitchFamily="34" charset="-128"/>
+              </a:rPr>
+              <a:t>桌面控制台</a:t>
+            </a:r>
+            <a:r>
+              <a:rPr sz="3200" dirty="0">
+                <a:latin typeface="HGSGothicE" panose="020B0900000000000000" pitchFamily="34" charset="-128"/>
+                <a:ea typeface="HGSGothicE" panose="020B0900000000000000" pitchFamily="34" charset="-128"/>
+              </a:rPr>
+              <a:t> + Web </a:t>
+            </a:r>
+            <a:r>
+              <a:rPr sz="3200" dirty="0" err="1">
+                <a:latin typeface="HGSGothicE" panose="020B0900000000000000" pitchFamily="34" charset="-128"/>
+                <a:ea typeface="HGSGothicE" panose="020B0900000000000000" pitchFamily="34" charset="-128"/>
+              </a:rPr>
+              <a:t>儀表板顯示</a:t>
+            </a:r>
+            <a:endParaRPr sz="3200" dirty="0">
+              <a:latin typeface="HGSGothicE" panose="020B0900000000000000" pitchFamily="34" charset="-128"/>
+              <a:ea typeface="HGSGothicE" panose="020B0900000000000000" pitchFamily="34" charset="-128"/>
+            </a:endParaRPr>
           </a:p>
           <a:p>
             <a:pPr>
@@ -4444,8 +5188,37 @@
               <a:defRPr sz="2200"/>
             </a:pPr>
             <a:r>
-              <a:t>• 資料記錄（SQLite）+ 錄影存檔</a:t>
-            </a:r>
+              <a:rPr sz="3200" dirty="0">
+                <a:latin typeface="HGSGothicE" panose="020B0900000000000000" pitchFamily="34" charset="-128"/>
+                <a:ea typeface="HGSGothicE" panose="020B0900000000000000" pitchFamily="34" charset="-128"/>
+              </a:rPr>
+              <a:t>• </a:t>
+            </a:r>
+            <a:r>
+              <a:rPr sz="3200" dirty="0" err="1">
+                <a:latin typeface="HGSGothicE" panose="020B0900000000000000" pitchFamily="34" charset="-128"/>
+                <a:ea typeface="HGSGothicE" panose="020B0900000000000000" pitchFamily="34" charset="-128"/>
+              </a:rPr>
+              <a:t>資料記錄（SQLite</a:t>
+            </a:r>
+            <a:r>
+              <a:rPr sz="3200" dirty="0">
+                <a:latin typeface="HGSGothicE" panose="020B0900000000000000" pitchFamily="34" charset="-128"/>
+                <a:ea typeface="HGSGothicE" panose="020B0900000000000000" pitchFamily="34" charset="-128"/>
+              </a:rPr>
+              <a:t>）+ </a:t>
+            </a:r>
+            <a:r>
+              <a:rPr sz="3200" dirty="0" err="1">
+                <a:latin typeface="HGSGothicE" panose="020B0900000000000000" pitchFamily="34" charset="-128"/>
+                <a:ea typeface="HGSGothicE" panose="020B0900000000000000" pitchFamily="34" charset="-128"/>
+              </a:rPr>
+              <a:t>錄影存檔</a:t>
+            </a:r>
+            <a:endParaRPr sz="3200" dirty="0">
+              <a:latin typeface="HGSGothicE" panose="020B0900000000000000" pitchFamily="34" charset="-128"/>
+              <a:ea typeface="HGSGothicE" panose="020B0900000000000000" pitchFamily="34" charset="-128"/>
+            </a:endParaRPr>
           </a:p>
         </p:txBody>
       </p:sp>
@@ -4462,9 +5235,15 @@
   <p:cSld>
     <p:bg>
       <p:bgPr>
-        <a:solidFill>
-          <a:srgbClr val="FFFFFF"/>
-        </a:solidFill>
+        <a:blipFill dpi="0" rotWithShape="1">
+          <a:blip r:embed="rId2">
+            <a:lum/>
+          </a:blip>
+          <a:srcRect/>
+          <a:stretch>
+            <a:fillRect/>
+          </a:stretch>
+        </a:blipFill>
         <a:effectLst/>
       </p:bgPr>
     </p:bg>
@@ -4491,7 +5270,7 @@
         <p:spPr>
           <a:xfrm>
             <a:off x="457200" y="365760"/>
-            <a:ext cx="8229600" cy="640080"/>
+            <a:ext cx="2242922" cy="707886"/>
           </a:xfrm>
           <a:prstGeom prst="rect">
             <a:avLst/>
@@ -4508,8 +5287,16 @@
               <a:defRPr sz="4000" b="1"/>
             </a:pPr>
             <a:r>
+              <a:rPr dirty="0" err="1">
+                <a:latin typeface="HGMinchoE" panose="02020909000000000000" pitchFamily="49" charset="-128"/>
+                <a:ea typeface="HGMinchoE" panose="02020909000000000000" pitchFamily="49" charset="-128"/>
+              </a:rPr>
               <a:t>系統功能</a:t>
             </a:r>
+            <a:endParaRPr dirty="0">
+              <a:latin typeface="HGMinchoE" panose="02020909000000000000" pitchFamily="49" charset="-128"/>
+              <a:ea typeface="HGMinchoE" panose="02020909000000000000" pitchFamily="49" charset="-128"/>
+            </a:endParaRPr>
           </a:p>
         </p:txBody>
       </p:sp>
@@ -4522,7 +5309,7 @@
         <p:spPr>
           <a:xfrm>
             <a:off x="914400" y="1371600"/>
-            <a:ext cx="7315200" cy="5029200"/>
+            <a:ext cx="7315200" cy="4247317"/>
           </a:xfrm>
           <a:prstGeom prst="rect">
             <a:avLst/>
@@ -4535,7 +5322,7 @@
           </a:bodyPr>
           <a:lstStyle/>
           <a:p>
-            <a:endParaRPr/>
+            <a:endParaRPr dirty="0"/>
           </a:p>
           <a:p>
             <a:pPr>
@@ -4548,8 +5335,30 @@
               <a:defRPr sz="2200"/>
             </a:pPr>
             <a:r>
-              <a:t>✓ 即時攝影機預覽與臉部影像擷取</a:t>
-            </a:r>
+              <a:rPr lang="en-US" altLang="zh-TW" sz="3200" dirty="0">
+                <a:latin typeface="HGSGothicE" panose="020B0900000000000000" pitchFamily="34" charset="-128"/>
+                <a:ea typeface="HGSGothicE" panose="020B0900000000000000" pitchFamily="34" charset="-128"/>
+              </a:rPr>
+              <a:t>•</a:t>
+            </a:r>
+            <a:r>
+              <a:rPr sz="3200" dirty="0">
+                <a:latin typeface="HGSGothicE" panose="020B0900000000000000" pitchFamily="34" charset="-128"/>
+                <a:ea typeface="HGSGothicE" panose="020B0900000000000000" pitchFamily="34" charset="-128"/>
+              </a:rPr>
+              <a:t> </a:t>
+            </a:r>
+            <a:r>
+              <a:rPr sz="3200" dirty="0" err="1">
+                <a:latin typeface="HGSGothicE" panose="020B0900000000000000" pitchFamily="34" charset="-128"/>
+                <a:ea typeface="HGSGothicE" panose="020B0900000000000000" pitchFamily="34" charset="-128"/>
+              </a:rPr>
+              <a:t>即時攝影機預覽與臉部影像擷取</a:t>
+            </a:r>
+            <a:endParaRPr sz="3200" dirty="0">
+              <a:latin typeface="HGSGothicE" panose="020B0900000000000000" pitchFamily="34" charset="-128"/>
+              <a:ea typeface="HGSGothicE" panose="020B0900000000000000" pitchFamily="34" charset="-128"/>
+            </a:endParaRPr>
           </a:p>
           <a:p>
             <a:pPr>
@@ -4562,7 +5371,32 @@
               <a:defRPr sz="2200"/>
             </a:pPr>
             <a:r>
-              <a:t>✓ 多項疲勞特徵辨識（眼睛、頭部、行為）</a:t>
+              <a:rPr lang="en-US" altLang="zh-TW" sz="3200" dirty="0">
+                <a:latin typeface="HGSGothicE" panose="020B0900000000000000" pitchFamily="34" charset="-128"/>
+                <a:ea typeface="HGSGothicE" panose="020B0900000000000000" pitchFamily="34" charset="-128"/>
+              </a:rPr>
+              <a:t>•</a:t>
+            </a:r>
+            <a:r>
+              <a:rPr sz="3200" dirty="0">
+                <a:latin typeface="HGSGothicE" panose="020B0900000000000000" pitchFamily="34" charset="-128"/>
+                <a:ea typeface="HGSGothicE" panose="020B0900000000000000" pitchFamily="34" charset="-128"/>
+              </a:rPr>
+              <a:t> </a:t>
+            </a:r>
+            <a:r>
+              <a:rPr sz="3200" dirty="0" err="1">
+                <a:latin typeface="HGSGothicE" panose="020B0900000000000000" pitchFamily="34" charset="-128"/>
+                <a:ea typeface="HGSGothicE" panose="020B0900000000000000" pitchFamily="34" charset="-128"/>
+              </a:rPr>
+              <a:t>多項疲勞特徵辨識（眼睛、頭部、行為</a:t>
+            </a:r>
+            <a:r>
+              <a:rPr sz="3200" dirty="0">
+                <a:latin typeface="HGSGothicE" panose="020B0900000000000000" pitchFamily="34" charset="-128"/>
+                <a:ea typeface="HGSGothicE" panose="020B0900000000000000" pitchFamily="34" charset="-128"/>
+              </a:rPr>
+              <a:t>）</a:t>
             </a:r>
           </a:p>
           <a:p>
@@ -4576,8 +5410,58 @@
               <a:defRPr sz="2200"/>
             </a:pPr>
             <a:r>
-              <a:t>✓ rPPG 心率與 HRV 分析</a:t>
-            </a:r>
+              <a:rPr lang="en-US" altLang="zh-TW" sz="3200" dirty="0">
+                <a:latin typeface="HGSGothicE" panose="020B0900000000000000" pitchFamily="34" charset="-128"/>
+                <a:ea typeface="HGSGothicE" panose="020B0900000000000000" pitchFamily="34" charset="-128"/>
+              </a:rPr>
+              <a:t>•</a:t>
+            </a:r>
+            <a:r>
+              <a:rPr sz="3200" dirty="0">
+                <a:latin typeface="HGSGothicE" panose="020B0900000000000000" pitchFamily="34" charset="-128"/>
+                <a:ea typeface="HGSGothicE" panose="020B0900000000000000" pitchFamily="34" charset="-128"/>
+              </a:rPr>
+              <a:t> </a:t>
+            </a:r>
+            <a:r>
+              <a:rPr sz="3200" dirty="0" err="1">
+                <a:latin typeface="HGSGothicE" panose="020B0900000000000000" pitchFamily="34" charset="-128"/>
+                <a:ea typeface="HGSGothicE" panose="020B0900000000000000" pitchFamily="34" charset="-128"/>
+              </a:rPr>
+              <a:t>rPPG</a:t>
+            </a:r>
+            <a:r>
+              <a:rPr sz="3200" dirty="0">
+                <a:latin typeface="HGSGothicE" panose="020B0900000000000000" pitchFamily="34" charset="-128"/>
+                <a:ea typeface="HGSGothicE" panose="020B0900000000000000" pitchFamily="34" charset="-128"/>
+              </a:rPr>
+              <a:t> </a:t>
+            </a:r>
+            <a:r>
+              <a:rPr sz="3200" dirty="0" err="1">
+                <a:latin typeface="HGSGothicE" panose="020B0900000000000000" pitchFamily="34" charset="-128"/>
+                <a:ea typeface="HGSGothicE" panose="020B0900000000000000" pitchFamily="34" charset="-128"/>
+              </a:rPr>
+              <a:t>心率與</a:t>
+            </a:r>
+            <a:r>
+              <a:rPr sz="3200" dirty="0">
+                <a:latin typeface="HGSGothicE" panose="020B0900000000000000" pitchFamily="34" charset="-128"/>
+                <a:ea typeface="HGSGothicE" panose="020B0900000000000000" pitchFamily="34" charset="-128"/>
+              </a:rPr>
+              <a:t> HRV </a:t>
+            </a:r>
+            <a:r>
+              <a:rPr sz="3200" dirty="0" err="1">
+                <a:latin typeface="HGSGothicE" panose="020B0900000000000000" pitchFamily="34" charset="-128"/>
+                <a:ea typeface="HGSGothicE" panose="020B0900000000000000" pitchFamily="34" charset="-128"/>
+              </a:rPr>
+              <a:t>分析</a:t>
+            </a:r>
+            <a:endParaRPr sz="3200" dirty="0">
+              <a:latin typeface="HGSGothicE" panose="020B0900000000000000" pitchFamily="34" charset="-128"/>
+              <a:ea typeface="HGSGothicE" panose="020B0900000000000000" pitchFamily="34" charset="-128"/>
+            </a:endParaRPr>
           </a:p>
           <a:p>
             <a:pPr>
@@ -4590,8 +5474,30 @@
               <a:defRPr sz="2200"/>
             </a:pPr>
             <a:r>
-              <a:t>✓ 疲勞警示與狀態顯示</a:t>
-            </a:r>
+              <a:rPr lang="en-US" altLang="zh-TW" sz="3200" dirty="0">
+                <a:latin typeface="HGSGothicE" panose="020B0900000000000000" pitchFamily="34" charset="-128"/>
+                <a:ea typeface="HGSGothicE" panose="020B0900000000000000" pitchFamily="34" charset="-128"/>
+              </a:rPr>
+              <a:t>•</a:t>
+            </a:r>
+            <a:r>
+              <a:rPr sz="3200" dirty="0">
+                <a:latin typeface="HGSGothicE" panose="020B0900000000000000" pitchFamily="34" charset="-128"/>
+                <a:ea typeface="HGSGothicE" panose="020B0900000000000000" pitchFamily="34" charset="-128"/>
+              </a:rPr>
+              <a:t> </a:t>
+            </a:r>
+            <a:r>
+              <a:rPr sz="3200" dirty="0" err="1">
+                <a:latin typeface="HGSGothicE" panose="020B0900000000000000" pitchFamily="34" charset="-128"/>
+                <a:ea typeface="HGSGothicE" panose="020B0900000000000000" pitchFamily="34" charset="-128"/>
+              </a:rPr>
+              <a:t>疲勞警示與狀態顯示</a:t>
+            </a:r>
+            <a:endParaRPr sz="3200" dirty="0">
+              <a:latin typeface="HGSGothicE" panose="020B0900000000000000" pitchFamily="34" charset="-128"/>
+              <a:ea typeface="HGSGothicE" panose="020B0900000000000000" pitchFamily="34" charset="-128"/>
+            </a:endParaRPr>
           </a:p>
           <a:p>
             <a:pPr>
@@ -4604,8 +5510,44 @@
               <a:defRPr sz="2200"/>
             </a:pPr>
             <a:r>
-              <a:t>✓ 資料記錄與 Web 儀表板</a:t>
-            </a:r>
+              <a:rPr lang="en-US" altLang="zh-TW" sz="3200" dirty="0">
+                <a:latin typeface="HGSGothicE" panose="020B0900000000000000" pitchFamily="34" charset="-128"/>
+                <a:ea typeface="HGSGothicE" panose="020B0900000000000000" pitchFamily="34" charset="-128"/>
+              </a:rPr>
+              <a:t>•</a:t>
+            </a:r>
+            <a:r>
+              <a:rPr sz="3200" dirty="0">
+                <a:latin typeface="HGSGothicE" panose="020B0900000000000000" pitchFamily="34" charset="-128"/>
+                <a:ea typeface="HGSGothicE" panose="020B0900000000000000" pitchFamily="34" charset="-128"/>
+              </a:rPr>
+              <a:t> </a:t>
+            </a:r>
+            <a:r>
+              <a:rPr sz="3200" dirty="0" err="1">
+                <a:latin typeface="HGSGothicE" panose="020B0900000000000000" pitchFamily="34" charset="-128"/>
+                <a:ea typeface="HGSGothicE" panose="020B0900000000000000" pitchFamily="34" charset="-128"/>
+              </a:rPr>
+              <a:t>資料記錄與</a:t>
+            </a:r>
+            <a:r>
+              <a:rPr sz="3200" dirty="0">
+                <a:latin typeface="HGSGothicE" panose="020B0900000000000000" pitchFamily="34" charset="-128"/>
+                <a:ea typeface="HGSGothicE" panose="020B0900000000000000" pitchFamily="34" charset="-128"/>
+              </a:rPr>
+              <a:t> Web </a:t>
+            </a:r>
+            <a:r>
+              <a:rPr sz="3200" dirty="0" err="1">
+                <a:latin typeface="HGSGothicE" panose="020B0900000000000000" pitchFamily="34" charset="-128"/>
+                <a:ea typeface="HGSGothicE" panose="020B0900000000000000" pitchFamily="34" charset="-128"/>
+              </a:rPr>
+              <a:t>儀表板</a:t>
+            </a:r>
+            <a:endParaRPr sz="3200" dirty="0">
+              <a:latin typeface="HGSGothicE" panose="020B0900000000000000" pitchFamily="34" charset="-128"/>
+              <a:ea typeface="HGSGothicE" panose="020B0900000000000000" pitchFamily="34" charset="-128"/>
+            </a:endParaRPr>
           </a:p>
         </p:txBody>
       </p:sp>
@@ -4622,9 +5564,15 @@
   <p:cSld>
     <p:bg>
       <p:bgPr>
-        <a:solidFill>
-          <a:srgbClr val="FFFFFF"/>
-        </a:solidFill>
+        <a:blipFill dpi="0" rotWithShape="1">
+          <a:blip r:embed="rId2">
+            <a:lum/>
+          </a:blip>
+          <a:srcRect/>
+          <a:stretch>
+            <a:fillRect/>
+          </a:stretch>
+        </a:blipFill>
         <a:effectLst/>
       </p:bgPr>
     </p:bg>
@@ -4651,7 +5599,7 @@
         <p:spPr>
           <a:xfrm>
             <a:off x="457200" y="365760"/>
-            <a:ext cx="8229600" cy="640080"/>
+            <a:ext cx="3275256" cy="707886"/>
           </a:xfrm>
           <a:prstGeom prst="rect">
             <a:avLst/>
@@ -4668,7 +5616,18 @@
               <a:defRPr sz="4000" b="1"/>
             </a:pPr>
             <a:r>
-              <a:t>理論基礎 (1)</a:t>
+              <a:rPr dirty="0" err="1">
+                <a:latin typeface="HGMinchoE" panose="02020909000000000000" pitchFamily="49" charset="-128"/>
+                <a:ea typeface="HGMinchoE" panose="02020909000000000000" pitchFamily="49" charset="-128"/>
+              </a:rPr>
+              <a:t>理論基礎</a:t>
+            </a:r>
+            <a:r>
+              <a:rPr dirty="0">
+                <a:latin typeface="HGMinchoE" panose="02020909000000000000" pitchFamily="49" charset="-128"/>
+                <a:ea typeface="HGMinchoE" panose="02020909000000000000" pitchFamily="49" charset="-128"/>
+              </a:rPr>
+              <a:t> (1)</a:t>
             </a:r>
           </a:p>
         </p:txBody>
@@ -4682,7 +5641,7 @@
         <p:spPr>
           <a:xfrm>
             <a:off x="914400" y="1371600"/>
-            <a:ext cx="7315200" cy="5029200"/>
+            <a:ext cx="7315200" cy="4247317"/>
           </a:xfrm>
           <a:prstGeom prst="rect">
             <a:avLst/>
@@ -4695,7 +5654,7 @@
           </a:bodyPr>
           <a:lstStyle/>
           <a:p>
-            <a:endParaRPr/>
+            <a:endParaRPr dirty="0"/>
           </a:p>
           <a:p>
             <a:pPr>
@@ -4708,8 +5667,23 @@
               <a:defRPr sz="2200"/>
             </a:pPr>
             <a:r>
-              <a:t>• MediaPipe：478 個臉部關鍵點</a:t>
-            </a:r>
+              <a:rPr sz="3200" dirty="0">
+                <a:latin typeface="HGSGothicE" panose="020B0900000000000000" pitchFamily="34" charset="-128"/>
+                <a:ea typeface="HGSGothicE" panose="020B0900000000000000" pitchFamily="34" charset="-128"/>
+              </a:rPr>
+              <a:t>• MediaPipe：478 </a:t>
+            </a:r>
+            <a:r>
+              <a:rPr sz="3200" dirty="0" err="1">
+                <a:latin typeface="HGSGothicE" panose="020B0900000000000000" pitchFamily="34" charset="-128"/>
+                <a:ea typeface="HGSGothicE" panose="020B0900000000000000" pitchFamily="34" charset="-128"/>
+              </a:rPr>
+              <a:t>個臉部關鍵點</a:t>
+            </a:r>
+            <a:endParaRPr sz="3200" dirty="0">
+              <a:latin typeface="HGSGothicE" panose="020B0900000000000000" pitchFamily="34" charset="-128"/>
+              <a:ea typeface="HGSGothicE" panose="020B0900000000000000" pitchFamily="34" charset="-128"/>
+            </a:endParaRPr>
           </a:p>
           <a:p>
             <a:pPr>
@@ -4722,8 +5696,23 @@
               <a:defRPr sz="2200"/>
             </a:pPr>
             <a:r>
-              <a:t>• EAR (Eye Aspect Ratio)：眼睛張合度</a:t>
-            </a:r>
+              <a:rPr sz="3200" dirty="0">
+                <a:latin typeface="HGSGothicE" panose="020B0900000000000000" pitchFamily="34" charset="-128"/>
+                <a:ea typeface="HGSGothicE" panose="020B0900000000000000" pitchFamily="34" charset="-128"/>
+              </a:rPr>
+              <a:t>• EAR (Eye Aspect Ratio)：</a:t>
+            </a:r>
+            <a:r>
+              <a:rPr sz="3200" dirty="0" err="1">
+                <a:latin typeface="HGSGothicE" panose="020B0900000000000000" pitchFamily="34" charset="-128"/>
+                <a:ea typeface="HGSGothicE" panose="020B0900000000000000" pitchFamily="34" charset="-128"/>
+              </a:rPr>
+              <a:t>眼睛張合度</a:t>
+            </a:r>
+            <a:endParaRPr sz="3200" dirty="0">
+              <a:latin typeface="HGSGothicE" panose="020B0900000000000000" pitchFamily="34" charset="-128"/>
+              <a:ea typeface="HGSGothicE" panose="020B0900000000000000" pitchFamily="34" charset="-128"/>
+            </a:endParaRPr>
           </a:p>
           <a:p>
             <a:pPr>
@@ -4736,8 +5725,23 @@
               <a:defRPr sz="2200"/>
             </a:pPr>
             <a:r>
-              <a:t>• PERCLOS：眼睛閉合百分比</a:t>
-            </a:r>
+              <a:rPr sz="3200" dirty="0">
+                <a:latin typeface="HGSGothicE" panose="020B0900000000000000" pitchFamily="34" charset="-128"/>
+                <a:ea typeface="HGSGothicE" panose="020B0900000000000000" pitchFamily="34" charset="-128"/>
+              </a:rPr>
+              <a:t>• </a:t>
+            </a:r>
+            <a:r>
+              <a:rPr sz="3200" dirty="0" err="1">
+                <a:latin typeface="HGSGothicE" panose="020B0900000000000000" pitchFamily="34" charset="-128"/>
+                <a:ea typeface="HGSGothicE" panose="020B0900000000000000" pitchFamily="34" charset="-128"/>
+              </a:rPr>
+              <a:t>PERCLOS：眼睛閉合百分比</a:t>
+            </a:r>
+            <a:endParaRPr sz="3200" dirty="0">
+              <a:latin typeface="HGSGothicE" panose="020B0900000000000000" pitchFamily="34" charset="-128"/>
+              <a:ea typeface="HGSGothicE" panose="020B0900000000000000" pitchFamily="34" charset="-128"/>
+            </a:endParaRPr>
           </a:p>
           <a:p>
             <a:pPr>
@@ -4750,7 +5754,25 @@
               <a:defRPr sz="2200"/>
             </a:pPr>
             <a:r>
-              <a:t>• 頭部姿態估測（solvePnP）</a:t>
+              <a:rPr sz="3200" dirty="0">
+                <a:latin typeface="HGSGothicE" panose="020B0900000000000000" pitchFamily="34" charset="-128"/>
+                <a:ea typeface="HGSGothicE" panose="020B0900000000000000" pitchFamily="34" charset="-128"/>
+              </a:rPr>
+              <a:t>• </a:t>
+            </a:r>
+            <a:r>
+              <a:rPr sz="3200" dirty="0" err="1">
+                <a:latin typeface="HGSGothicE" panose="020B0900000000000000" pitchFamily="34" charset="-128"/>
+                <a:ea typeface="HGSGothicE" panose="020B0900000000000000" pitchFamily="34" charset="-128"/>
+              </a:rPr>
+              <a:t>頭部姿態估測（solvePnP</a:t>
+            </a:r>
+            <a:r>
+              <a:rPr sz="3200" dirty="0">
+                <a:latin typeface="HGSGothicE" panose="020B0900000000000000" pitchFamily="34" charset="-128"/>
+                <a:ea typeface="HGSGothicE" panose="020B0900000000000000" pitchFamily="34" charset="-128"/>
+              </a:rPr>
+              <a:t>）</a:t>
             </a:r>
           </a:p>
           <a:p>
@@ -4764,8 +5786,23 @@
               <a:defRPr sz="2200"/>
             </a:pPr>
             <a:r>
-              <a:t>• 虹膜追蹤與瞳孔分析</a:t>
-            </a:r>
+              <a:rPr sz="3200" dirty="0">
+                <a:latin typeface="HGSGothicE" panose="020B0900000000000000" pitchFamily="34" charset="-128"/>
+                <a:ea typeface="HGSGothicE" panose="020B0900000000000000" pitchFamily="34" charset="-128"/>
+              </a:rPr>
+              <a:t>• </a:t>
+            </a:r>
+            <a:r>
+              <a:rPr sz="3200" dirty="0" err="1">
+                <a:latin typeface="HGSGothicE" panose="020B0900000000000000" pitchFamily="34" charset="-128"/>
+                <a:ea typeface="HGSGothicE" panose="020B0900000000000000" pitchFamily="34" charset="-128"/>
+              </a:rPr>
+              <a:t>虹膜追蹤與瞳孔分析</a:t>
+            </a:r>
+            <a:endParaRPr sz="3200" dirty="0">
+              <a:latin typeface="HGSGothicE" panose="020B0900000000000000" pitchFamily="34" charset="-128"/>
+              <a:ea typeface="HGSGothicE" panose="020B0900000000000000" pitchFamily="34" charset="-128"/>
+            </a:endParaRPr>
           </a:p>
         </p:txBody>
       </p:sp>
@@ -4782,9 +5819,15 @@
   <p:cSld>
     <p:bg>
       <p:bgPr>
-        <a:solidFill>
-          <a:srgbClr val="FFFFFF"/>
-        </a:solidFill>
+        <a:blipFill dpi="0" rotWithShape="1">
+          <a:blip r:embed="rId2">
+            <a:lum/>
+          </a:blip>
+          <a:srcRect/>
+          <a:stretch>
+            <a:fillRect/>
+          </a:stretch>
+        </a:blipFill>
         <a:effectLst/>
       </p:bgPr>
     </p:bg>
@@ -4811,7 +5854,7 @@
         <p:spPr>
           <a:xfrm>
             <a:off x="457200" y="365760"/>
-            <a:ext cx="8229600" cy="640080"/>
+            <a:ext cx="3275256" cy="707886"/>
           </a:xfrm>
           <a:prstGeom prst="rect">
             <a:avLst/>
@@ -4828,7 +5871,18 @@
               <a:defRPr sz="4000" b="1"/>
             </a:pPr>
             <a:r>
-              <a:t>理論基礎 (2)</a:t>
+              <a:rPr dirty="0" err="1">
+                <a:latin typeface="HGMinchoE" panose="02020909000000000000" pitchFamily="49" charset="-128"/>
+                <a:ea typeface="HGMinchoE" panose="02020909000000000000" pitchFamily="49" charset="-128"/>
+              </a:rPr>
+              <a:t>理論基礎</a:t>
+            </a:r>
+            <a:r>
+              <a:rPr dirty="0">
+                <a:latin typeface="HGMinchoE" panose="02020909000000000000" pitchFamily="49" charset="-128"/>
+                <a:ea typeface="HGMinchoE" panose="02020909000000000000" pitchFamily="49" charset="-128"/>
+              </a:rPr>
+              <a:t> (2)</a:t>
             </a:r>
           </a:p>
         </p:txBody>
@@ -4842,7 +5896,7 @@
         <p:spPr>
           <a:xfrm>
             <a:off x="914400" y="1371600"/>
-            <a:ext cx="7315200" cy="5029200"/>
+            <a:ext cx="7315200" cy="3754874"/>
           </a:xfrm>
           <a:prstGeom prst="rect">
             <a:avLst/>
@@ -4855,7 +5909,7 @@
           </a:bodyPr>
           <a:lstStyle/>
           <a:p>
-            <a:endParaRPr/>
+            <a:endParaRPr dirty="0"/>
           </a:p>
           <a:p>
             <a:pPr>
@@ -4868,8 +5922,23 @@
               <a:defRPr sz="2200"/>
             </a:pPr>
             <a:r>
-              <a:t>• rPPG：非接觸式脈搏訊號</a:t>
-            </a:r>
+              <a:rPr sz="3200" dirty="0">
+                <a:latin typeface="HGSGothicE" panose="020B0900000000000000" pitchFamily="34" charset="-128"/>
+                <a:ea typeface="HGSGothicE" panose="020B0900000000000000" pitchFamily="34" charset="-128"/>
+              </a:rPr>
+              <a:t>• </a:t>
+            </a:r>
+            <a:r>
+              <a:rPr sz="3200" dirty="0" err="1">
+                <a:latin typeface="HGSGothicE" panose="020B0900000000000000" pitchFamily="34" charset="-128"/>
+                <a:ea typeface="HGSGothicE" panose="020B0900000000000000" pitchFamily="34" charset="-128"/>
+              </a:rPr>
+              <a:t>rPPG：非接觸式脈搏訊號</a:t>
+            </a:r>
+            <a:endParaRPr sz="3200" dirty="0">
+              <a:latin typeface="HGSGothicE" panose="020B0900000000000000" pitchFamily="34" charset="-128"/>
+              <a:ea typeface="HGSGothicE" panose="020B0900000000000000" pitchFamily="34" charset="-128"/>
+            </a:endParaRPr>
           </a:p>
           <a:p>
             <a:pPr>
@@ -4882,8 +5951,37 @@
               <a:defRPr sz="2200"/>
             </a:pPr>
             <a:r>
-              <a:t>• 心率 (HR) 與 HRV 分析</a:t>
-            </a:r>
+              <a:rPr sz="3200" dirty="0">
+                <a:latin typeface="HGSGothicE" panose="020B0900000000000000" pitchFamily="34" charset="-128"/>
+                <a:ea typeface="HGSGothicE" panose="020B0900000000000000" pitchFamily="34" charset="-128"/>
+              </a:rPr>
+              <a:t>• </a:t>
+            </a:r>
+            <a:r>
+              <a:rPr sz="3200" dirty="0" err="1">
+                <a:latin typeface="HGSGothicE" panose="020B0900000000000000" pitchFamily="34" charset="-128"/>
+                <a:ea typeface="HGSGothicE" panose="020B0900000000000000" pitchFamily="34" charset="-128"/>
+              </a:rPr>
+              <a:t>心率</a:t>
+            </a:r>
+            <a:r>
+              <a:rPr sz="3200" dirty="0">
+                <a:latin typeface="HGSGothicE" panose="020B0900000000000000" pitchFamily="34" charset="-128"/>
+                <a:ea typeface="HGSGothicE" panose="020B0900000000000000" pitchFamily="34" charset="-128"/>
+              </a:rPr>
+              <a:t> (HR) 與 HRV </a:t>
+            </a:r>
+            <a:r>
+              <a:rPr sz="3200" dirty="0" err="1">
+                <a:latin typeface="HGSGothicE" panose="020B0900000000000000" pitchFamily="34" charset="-128"/>
+                <a:ea typeface="HGSGothicE" panose="020B0900000000000000" pitchFamily="34" charset="-128"/>
+              </a:rPr>
+              <a:t>分析</a:t>
+            </a:r>
+            <a:endParaRPr sz="3200" dirty="0">
+              <a:latin typeface="HGSGothicE" panose="020B0900000000000000" pitchFamily="34" charset="-128"/>
+              <a:ea typeface="HGSGothicE" panose="020B0900000000000000" pitchFamily="34" charset="-128"/>
+            </a:endParaRPr>
           </a:p>
           <a:p>
             <a:pPr>
@@ -4896,8 +5994,23 @@
               <a:defRPr sz="2200"/>
             </a:pPr>
             <a:r>
-              <a:t>• 多特徵加權評分模型</a:t>
-            </a:r>
+              <a:rPr sz="3200" dirty="0">
+                <a:latin typeface="HGSGothicE" panose="020B0900000000000000" pitchFamily="34" charset="-128"/>
+                <a:ea typeface="HGSGothicE" panose="020B0900000000000000" pitchFamily="34" charset="-128"/>
+              </a:rPr>
+              <a:t>• </a:t>
+            </a:r>
+            <a:r>
+              <a:rPr sz="3200" dirty="0" err="1">
+                <a:latin typeface="HGSGothicE" panose="020B0900000000000000" pitchFamily="34" charset="-128"/>
+                <a:ea typeface="HGSGothicE" panose="020B0900000000000000" pitchFamily="34" charset="-128"/>
+              </a:rPr>
+              <a:t>多特徵加權評分模型</a:t>
+            </a:r>
+            <a:endParaRPr sz="3200" dirty="0">
+              <a:latin typeface="HGSGothicE" panose="020B0900000000000000" pitchFamily="34" charset="-128"/>
+              <a:ea typeface="HGSGothicE" panose="020B0900000000000000" pitchFamily="34" charset="-128"/>
+            </a:endParaRPr>
           </a:p>
           <a:p>
             <a:pPr>
@@ -4910,8 +6023,23 @@
               <a:defRPr sz="2200"/>
             </a:pPr>
             <a:r>
-              <a:t>• 眨眼、打呵欠、皺眉微表情</a:t>
-            </a:r>
+              <a:rPr sz="3200" dirty="0">
+                <a:latin typeface="HGSGothicE" panose="020B0900000000000000" pitchFamily="34" charset="-128"/>
+                <a:ea typeface="HGSGothicE" panose="020B0900000000000000" pitchFamily="34" charset="-128"/>
+              </a:rPr>
+              <a:t>• </a:t>
+            </a:r>
+            <a:r>
+              <a:rPr sz="3200" dirty="0" err="1">
+                <a:latin typeface="HGSGothicE" panose="020B0900000000000000" pitchFamily="34" charset="-128"/>
+                <a:ea typeface="HGSGothicE" panose="020B0900000000000000" pitchFamily="34" charset="-128"/>
+              </a:rPr>
+              <a:t>眨眼、打呵欠、皺眉微表情</a:t>
+            </a:r>
+            <a:endParaRPr sz="3200" dirty="0">
+              <a:latin typeface="HGSGothicE" panose="020B0900000000000000" pitchFamily="34" charset="-128"/>
+              <a:ea typeface="HGSGothicE" panose="020B0900000000000000" pitchFamily="34" charset="-128"/>
+            </a:endParaRPr>
           </a:p>
           <a:p>
             <a:pPr>
@@ -4924,8 +6052,51 @@
               <a:defRPr sz="2200"/>
             </a:pPr>
             <a:r>
-              <a:t>• 綜合判定：正常 / 疲勞 / 困頓</a:t>
-            </a:r>
+              <a:rPr sz="3200" dirty="0">
+                <a:latin typeface="HGSGothicE" panose="020B0900000000000000" pitchFamily="34" charset="-128"/>
+                <a:ea typeface="HGSGothicE" panose="020B0900000000000000" pitchFamily="34" charset="-128"/>
+              </a:rPr>
+              <a:t>• </a:t>
+            </a:r>
+            <a:r>
+              <a:rPr sz="3200" dirty="0" err="1">
+                <a:latin typeface="HGSGothicE" panose="020B0900000000000000" pitchFamily="34" charset="-128"/>
+                <a:ea typeface="HGSGothicE" panose="020B0900000000000000" pitchFamily="34" charset="-128"/>
+              </a:rPr>
+              <a:t>綜合判定：正常</a:t>
+            </a:r>
+            <a:r>
+              <a:rPr sz="3200" dirty="0">
+                <a:latin typeface="HGSGothicE" panose="020B0900000000000000" pitchFamily="34" charset="-128"/>
+                <a:ea typeface="HGSGothicE" panose="020B0900000000000000" pitchFamily="34" charset="-128"/>
+              </a:rPr>
+              <a:t> / </a:t>
+            </a:r>
+            <a:r>
+              <a:rPr sz="3200" dirty="0" err="1">
+                <a:latin typeface="HGSGothicE" panose="020B0900000000000000" pitchFamily="34" charset="-128"/>
+                <a:ea typeface="HGSGothicE" panose="020B0900000000000000" pitchFamily="34" charset="-128"/>
+              </a:rPr>
+              <a:t>疲勞</a:t>
+            </a:r>
+            <a:r>
+              <a:rPr sz="3200" dirty="0">
+                <a:latin typeface="HGSGothicE" panose="020B0900000000000000" pitchFamily="34" charset="-128"/>
+                <a:ea typeface="HGSGothicE" panose="020B0900000000000000" pitchFamily="34" charset="-128"/>
+              </a:rPr>
+              <a:t> / </a:t>
+            </a:r>
+            <a:r>
+              <a:rPr sz="3200" dirty="0" err="1">
+                <a:latin typeface="HGSGothicE" panose="020B0900000000000000" pitchFamily="34" charset="-128"/>
+                <a:ea typeface="HGSGothicE" panose="020B0900000000000000" pitchFamily="34" charset="-128"/>
+              </a:rPr>
+              <a:t>困頓</a:t>
+            </a:r>
+            <a:endParaRPr sz="3200" dirty="0">
+              <a:latin typeface="HGSGothicE" panose="020B0900000000000000" pitchFamily="34" charset="-128"/>
+              <a:ea typeface="HGSGothicE" panose="020B0900000000000000" pitchFamily="34" charset="-128"/>
+            </a:endParaRPr>
           </a:p>
         </p:txBody>
       </p:sp>
@@ -4942,9 +6113,15 @@
   <p:cSld>
     <p:bg>
       <p:bgPr>
-        <a:solidFill>
-          <a:srgbClr val="FFFFFF"/>
-        </a:solidFill>
+        <a:blipFill dpi="0" rotWithShape="1">
+          <a:blip r:embed="rId2">
+            <a:lum/>
+          </a:blip>
+          <a:srcRect/>
+          <a:stretch>
+            <a:fillRect/>
+          </a:stretch>
+        </a:blipFill>
         <a:effectLst/>
       </p:bgPr>
     </p:bg>
@@ -4971,7 +6148,7 @@
         <p:spPr>
           <a:xfrm>
             <a:off x="457200" y="365760"/>
-            <a:ext cx="8229600" cy="640080"/>
+            <a:ext cx="2242922" cy="707886"/>
           </a:xfrm>
           <a:prstGeom prst="rect">
             <a:avLst/>
@@ -4988,8 +6165,16 @@
               <a:defRPr sz="4000" b="1"/>
             </a:pPr>
             <a:r>
+              <a:rPr dirty="0" err="1">
+                <a:latin typeface="HGMinchoE" panose="02020909000000000000" pitchFamily="49" charset="-128"/>
+                <a:ea typeface="HGMinchoE" panose="02020909000000000000" pitchFamily="49" charset="-128"/>
+              </a:rPr>
               <a:t>技術實現</a:t>
             </a:r>
+            <a:endParaRPr dirty="0">
+              <a:latin typeface="HGMinchoE" panose="02020909000000000000" pitchFamily="49" charset="-128"/>
+              <a:ea typeface="HGMinchoE" panose="02020909000000000000" pitchFamily="49" charset="-128"/>
+            </a:endParaRPr>
           </a:p>
         </p:txBody>
       </p:sp>
@@ -5002,7 +6187,7 @@
         <p:spPr>
           <a:xfrm>
             <a:off x="914400" y="1371600"/>
-            <a:ext cx="7315200" cy="5029200"/>
+            <a:ext cx="7315200" cy="3754874"/>
           </a:xfrm>
           <a:prstGeom prst="rect">
             <a:avLst/>
@@ -5015,7 +6200,7 @@
           </a:bodyPr>
           <a:lstStyle/>
           <a:p>
-            <a:endParaRPr/>
+            <a:endParaRPr dirty="0"/>
           </a:p>
           <a:p>
             <a:pPr>
@@ -5028,8 +6213,37 @@
               <a:defRPr sz="2200"/>
             </a:pPr>
             <a:r>
-              <a:t>• 硬體：Windows PC + USB 攝影機</a:t>
-            </a:r>
+              <a:rPr sz="3200" dirty="0">
+                <a:latin typeface="HGSGothicE" panose="020B0900000000000000" pitchFamily="34" charset="-128"/>
+                <a:ea typeface="HGSGothicE" panose="020B0900000000000000" pitchFamily="34" charset="-128"/>
+              </a:rPr>
+              <a:t>• </a:t>
+            </a:r>
+            <a:r>
+              <a:rPr sz="3200" dirty="0" err="1">
+                <a:latin typeface="HGSGothicE" panose="020B0900000000000000" pitchFamily="34" charset="-128"/>
+                <a:ea typeface="HGSGothicE" panose="020B0900000000000000" pitchFamily="34" charset="-128"/>
+              </a:rPr>
+              <a:t>硬體：Windows</a:t>
+            </a:r>
+            <a:r>
+              <a:rPr sz="3200" dirty="0">
+                <a:latin typeface="HGSGothicE" panose="020B0900000000000000" pitchFamily="34" charset="-128"/>
+                <a:ea typeface="HGSGothicE" panose="020B0900000000000000" pitchFamily="34" charset="-128"/>
+              </a:rPr>
+              <a:t> PC + USB </a:t>
+            </a:r>
+            <a:r>
+              <a:rPr sz="3200" dirty="0" err="1">
+                <a:latin typeface="HGSGothicE" panose="020B0900000000000000" pitchFamily="34" charset="-128"/>
+                <a:ea typeface="HGSGothicE" panose="020B0900000000000000" pitchFamily="34" charset="-128"/>
+              </a:rPr>
+              <a:t>攝影機</a:t>
+            </a:r>
+            <a:endParaRPr sz="3200" dirty="0">
+              <a:latin typeface="HGSGothicE" panose="020B0900000000000000" pitchFamily="34" charset="-128"/>
+              <a:ea typeface="HGSGothicE" panose="020B0900000000000000" pitchFamily="34" charset="-128"/>
+            </a:endParaRPr>
           </a:p>
           <a:p>
             <a:pPr>
@@ -5042,6 +6256,10 @@
               <a:defRPr sz="2200"/>
             </a:pPr>
             <a:r>
+              <a:rPr sz="3200" dirty="0">
+                <a:latin typeface="HGSGothicE" panose="020B0900000000000000" pitchFamily="34" charset="-128"/>
+                <a:ea typeface="HGSGothicE" panose="020B0900000000000000" pitchFamily="34" charset="-128"/>
+              </a:rPr>
               <a:t>• Python 3.10，PySide6，Flask</a:t>
             </a:r>
           </a:p>
@@ -5056,8 +6274,23 @@
               <a:defRPr sz="2200"/>
             </a:pPr>
             <a:r>
-              <a:t>• OpenCV，MediaPipe，NumPy</a:t>
-            </a:r>
+              <a:rPr sz="3200" dirty="0">
+                <a:latin typeface="HGSGothicE" panose="020B0900000000000000" pitchFamily="34" charset="-128"/>
+                <a:ea typeface="HGSGothicE" panose="020B0900000000000000" pitchFamily="34" charset="-128"/>
+              </a:rPr>
+              <a:t>• </a:t>
+            </a:r>
+            <a:r>
+              <a:rPr sz="3200" dirty="0" err="1">
+                <a:latin typeface="HGSGothicE" panose="020B0900000000000000" pitchFamily="34" charset="-128"/>
+                <a:ea typeface="HGSGothicE" panose="020B0900000000000000" pitchFamily="34" charset="-128"/>
+              </a:rPr>
+              <a:t>OpenCV，MediaPipe，NumPy</a:t>
+            </a:r>
+            <a:endParaRPr sz="3200" dirty="0">
+              <a:latin typeface="HGSGothicE" panose="020B0900000000000000" pitchFamily="34" charset="-128"/>
+              <a:ea typeface="HGSGothicE" panose="020B0900000000000000" pitchFamily="34" charset="-128"/>
+            </a:endParaRPr>
           </a:p>
           <a:p>
             <a:pPr>
@@ -5070,8 +6303,23 @@
               <a:defRPr sz="2200"/>
             </a:pPr>
             <a:r>
-              <a:t>• SQLite 資料庫，mp4 錄影</a:t>
-            </a:r>
+              <a:rPr sz="3200" dirty="0">
+                <a:latin typeface="HGSGothicE" panose="020B0900000000000000" pitchFamily="34" charset="-128"/>
+                <a:ea typeface="HGSGothicE" panose="020B0900000000000000" pitchFamily="34" charset="-128"/>
+              </a:rPr>
+              <a:t>• SQLite 資料庫，mp4 </a:t>
+            </a:r>
+            <a:r>
+              <a:rPr sz="3200" dirty="0" err="1">
+                <a:latin typeface="HGSGothicE" panose="020B0900000000000000" pitchFamily="34" charset="-128"/>
+                <a:ea typeface="HGSGothicE" panose="020B0900000000000000" pitchFamily="34" charset="-128"/>
+              </a:rPr>
+              <a:t>錄影</a:t>
+            </a:r>
+            <a:endParaRPr sz="3200" dirty="0">
+              <a:latin typeface="HGSGothicE" panose="020B0900000000000000" pitchFamily="34" charset="-128"/>
+              <a:ea typeface="HGSGothicE" panose="020B0900000000000000" pitchFamily="34" charset="-128"/>
+            </a:endParaRPr>
           </a:p>
           <a:p>
             <a:pPr>
@@ -5084,8 +6332,37 @@
               <a:defRPr sz="2200"/>
             </a:pPr>
             <a:r>
-              <a:t>• Web：Flask-SocketIO 實時傳輸</a:t>
-            </a:r>
+              <a:rPr sz="3200" dirty="0">
+                <a:latin typeface="HGSGothicE" panose="020B0900000000000000" pitchFamily="34" charset="-128"/>
+                <a:ea typeface="HGSGothicE" panose="020B0900000000000000" pitchFamily="34" charset="-128"/>
+              </a:rPr>
+              <a:t>• </a:t>
+            </a:r>
+            <a:r>
+              <a:rPr sz="3200" dirty="0" err="1">
+                <a:latin typeface="HGSGothicE" panose="020B0900000000000000" pitchFamily="34" charset="-128"/>
+                <a:ea typeface="HGSGothicE" panose="020B0900000000000000" pitchFamily="34" charset="-128"/>
+              </a:rPr>
+              <a:t>Web：Flask-SocketIO</a:t>
+            </a:r>
+            <a:r>
+              <a:rPr sz="3200" dirty="0">
+                <a:latin typeface="HGSGothicE" panose="020B0900000000000000" pitchFamily="34" charset="-128"/>
+                <a:ea typeface="HGSGothicE" panose="020B0900000000000000" pitchFamily="34" charset="-128"/>
+              </a:rPr>
+              <a:t> </a:t>
+            </a:r>
+            <a:r>
+              <a:rPr sz="3200" dirty="0" err="1">
+                <a:latin typeface="HGSGothicE" panose="020B0900000000000000" pitchFamily="34" charset="-128"/>
+                <a:ea typeface="HGSGothicE" panose="020B0900000000000000" pitchFamily="34" charset="-128"/>
+              </a:rPr>
+              <a:t>實時傳輸</a:t>
+            </a:r>
+            <a:endParaRPr sz="3200" dirty="0">
+              <a:latin typeface="HGSGothicE" panose="020B0900000000000000" pitchFamily="34" charset="-128"/>
+              <a:ea typeface="HGSGothicE" panose="020B0900000000000000" pitchFamily="34" charset="-128"/>
+            </a:endParaRPr>
           </a:p>
         </p:txBody>
       </p:sp>
@@ -5102,9 +6379,15 @@
   <p:cSld>
     <p:bg>
       <p:bgPr>
-        <a:solidFill>
-          <a:srgbClr val="FFFFFF"/>
-        </a:solidFill>
+        <a:blipFill dpi="0" rotWithShape="1">
+          <a:blip r:embed="rId2">
+            <a:lum/>
+          </a:blip>
+          <a:srcRect/>
+          <a:stretch>
+            <a:fillRect/>
+          </a:stretch>
+        </a:blipFill>
         <a:effectLst/>
       </p:bgPr>
     </p:bg>
@@ -5131,7 +6414,7 @@
         <p:spPr>
           <a:xfrm>
             <a:off x="457200" y="365760"/>
-            <a:ext cx="8229600" cy="640080"/>
+            <a:ext cx="2242922" cy="707886"/>
           </a:xfrm>
           <a:prstGeom prst="rect">
             <a:avLst/>
@@ -5148,8 +6431,16 @@
               <a:defRPr sz="4000" b="1"/>
             </a:pPr>
             <a:r>
+              <a:rPr dirty="0" err="1">
+                <a:latin typeface="HGMinchoE" panose="02020909000000000000" pitchFamily="49" charset="-128"/>
+                <a:ea typeface="HGMinchoE" panose="02020909000000000000" pitchFamily="49" charset="-128"/>
+              </a:rPr>
               <a:t>目前成果</a:t>
             </a:r>
+            <a:endParaRPr dirty="0">
+              <a:latin typeface="HGMinchoE" panose="02020909000000000000" pitchFamily="49" charset="-128"/>
+              <a:ea typeface="HGMinchoE" panose="02020909000000000000" pitchFamily="49" charset="-128"/>
+            </a:endParaRPr>
           </a:p>
         </p:txBody>
       </p:sp>
@@ -5162,7 +6453,7 @@
         <p:spPr>
           <a:xfrm>
             <a:off x="914400" y="1371600"/>
-            <a:ext cx="7315200" cy="5029200"/>
+            <a:ext cx="7315200" cy="3754874"/>
           </a:xfrm>
           <a:prstGeom prst="rect">
             <a:avLst/>
@@ -5175,7 +6466,7 @@
           </a:bodyPr>
           <a:lstStyle/>
           <a:p>
-            <a:endParaRPr/>
+            <a:endParaRPr dirty="0"/>
           </a:p>
           <a:p>
             <a:pPr>
@@ -5188,8 +6479,23 @@
               <a:defRPr sz="2200"/>
             </a:pPr>
             <a:r>
-              <a:t>✓ 系統原型整合與主控台完成</a:t>
-            </a:r>
+              <a:rPr sz="3200" dirty="0">
+                <a:latin typeface="HGSGothicE" panose="020B0900000000000000" pitchFamily="34" charset="-128"/>
+                <a:ea typeface="HGSGothicE" panose="020B0900000000000000" pitchFamily="34" charset="-128"/>
+              </a:rPr>
+              <a:t>✓ </a:t>
+            </a:r>
+            <a:r>
+              <a:rPr sz="3200" dirty="0" err="1">
+                <a:latin typeface="HGSGothicE" panose="020B0900000000000000" pitchFamily="34" charset="-128"/>
+                <a:ea typeface="HGSGothicE" panose="020B0900000000000000" pitchFamily="34" charset="-128"/>
+              </a:rPr>
+              <a:t>系統原型整合與主控台完成</a:t>
+            </a:r>
+            <a:endParaRPr sz="3200" dirty="0">
+              <a:latin typeface="HGSGothicE" panose="020B0900000000000000" pitchFamily="34" charset="-128"/>
+              <a:ea typeface="HGSGothicE" panose="020B0900000000000000" pitchFamily="34" charset="-128"/>
+            </a:endParaRPr>
           </a:p>
           <a:p>
             <a:pPr>
@@ -5202,8 +6508,23 @@
               <a:defRPr sz="2200"/>
             </a:pPr>
             <a:r>
-              <a:t>✓ 即時預覽與臉部特徵定位</a:t>
-            </a:r>
+              <a:rPr sz="3200" dirty="0">
+                <a:latin typeface="HGSGothicE" panose="020B0900000000000000" pitchFamily="34" charset="-128"/>
+                <a:ea typeface="HGSGothicE" panose="020B0900000000000000" pitchFamily="34" charset="-128"/>
+              </a:rPr>
+              <a:t>✓ </a:t>
+            </a:r>
+            <a:r>
+              <a:rPr sz="3200" dirty="0" err="1">
+                <a:latin typeface="HGSGothicE" panose="020B0900000000000000" pitchFamily="34" charset="-128"/>
+                <a:ea typeface="HGSGothicE" panose="020B0900000000000000" pitchFamily="34" charset="-128"/>
+              </a:rPr>
+              <a:t>即時預覽與臉部特徵定位</a:t>
+            </a:r>
+            <a:endParaRPr sz="3200" dirty="0">
+              <a:latin typeface="HGSGothicE" panose="020B0900000000000000" pitchFamily="34" charset="-128"/>
+              <a:ea typeface="HGSGothicE" panose="020B0900000000000000" pitchFamily="34" charset="-128"/>
+            </a:endParaRPr>
           </a:p>
           <a:p>
             <a:pPr>
@@ -5216,8 +6537,23 @@
               <a:defRPr sz="2200"/>
             </a:pPr>
             <a:r>
-              <a:t>✓ 疲勞分析引擎運作</a:t>
-            </a:r>
+              <a:rPr sz="3200" dirty="0">
+                <a:latin typeface="HGSGothicE" panose="020B0900000000000000" pitchFamily="34" charset="-128"/>
+                <a:ea typeface="HGSGothicE" panose="020B0900000000000000" pitchFamily="34" charset="-128"/>
+              </a:rPr>
+              <a:t>✓ </a:t>
+            </a:r>
+            <a:r>
+              <a:rPr sz="3200" dirty="0" err="1">
+                <a:latin typeface="HGSGothicE" panose="020B0900000000000000" pitchFamily="34" charset="-128"/>
+                <a:ea typeface="HGSGothicE" panose="020B0900000000000000" pitchFamily="34" charset="-128"/>
+              </a:rPr>
+              <a:t>疲勞分析引擎運作</a:t>
+            </a:r>
+            <a:endParaRPr sz="3200" dirty="0">
+              <a:latin typeface="HGSGothicE" panose="020B0900000000000000" pitchFamily="34" charset="-128"/>
+              <a:ea typeface="HGSGothicE" panose="020B0900000000000000" pitchFamily="34" charset="-128"/>
+            </a:endParaRPr>
           </a:p>
           <a:p>
             <a:pPr>
@@ -5230,8 +6566,23 @@
               <a:defRPr sz="2200"/>
             </a:pPr>
             <a:r>
-              <a:t>✓ 資料記錄與播放功能</a:t>
-            </a:r>
+              <a:rPr sz="3200" dirty="0">
+                <a:latin typeface="HGSGothicE" panose="020B0900000000000000" pitchFamily="34" charset="-128"/>
+                <a:ea typeface="HGSGothicE" panose="020B0900000000000000" pitchFamily="34" charset="-128"/>
+              </a:rPr>
+              <a:t>✓ </a:t>
+            </a:r>
+            <a:r>
+              <a:rPr sz="3200" dirty="0" err="1">
+                <a:latin typeface="HGSGothicE" panose="020B0900000000000000" pitchFamily="34" charset="-128"/>
+                <a:ea typeface="HGSGothicE" panose="020B0900000000000000" pitchFamily="34" charset="-128"/>
+              </a:rPr>
+              <a:t>資料記錄與播放功能</a:t>
+            </a:r>
+            <a:endParaRPr sz="3200" dirty="0">
+              <a:latin typeface="HGSGothicE" panose="020B0900000000000000" pitchFamily="34" charset="-128"/>
+              <a:ea typeface="HGSGothicE" panose="020B0900000000000000" pitchFamily="34" charset="-128"/>
+            </a:endParaRPr>
           </a:p>
           <a:p>
             <a:pPr>
@@ -5244,8 +6595,23 @@
               <a:defRPr sz="2200"/>
             </a:pPr>
             <a:r>
-              <a:t>✓ Web 儀表板即時顯示</a:t>
-            </a:r>
+              <a:rPr sz="3200" dirty="0">
+                <a:latin typeface="HGSGothicE" panose="020B0900000000000000" pitchFamily="34" charset="-128"/>
+                <a:ea typeface="HGSGothicE" panose="020B0900000000000000" pitchFamily="34" charset="-128"/>
+              </a:rPr>
+              <a:t>✓ Web </a:t>
+            </a:r>
+            <a:r>
+              <a:rPr sz="3200" dirty="0" err="1">
+                <a:latin typeface="HGSGothicE" panose="020B0900000000000000" pitchFamily="34" charset="-128"/>
+                <a:ea typeface="HGSGothicE" panose="020B0900000000000000" pitchFamily="34" charset="-128"/>
+              </a:rPr>
+              <a:t>儀表板即時顯示</a:t>
+            </a:r>
+            <a:endParaRPr sz="3200" dirty="0">
+              <a:latin typeface="HGSGothicE" panose="020B0900000000000000" pitchFamily="34" charset="-128"/>
+              <a:ea typeface="HGSGothicE" panose="020B0900000000000000" pitchFamily="34" charset="-128"/>
+            </a:endParaRPr>
           </a:p>
         </p:txBody>
       </p:sp>
